--- a/Topic_E/Exam_Practice/TE-L09_Speaking_Workshop_Comparing_Cultures_with_Respect.pptx
+++ b/Topic_E/Exam_Practice/TE-L09_Speaking_Workshop_Comparing_Cultures_with_Respect.pptx
@@ -615,7 +615,11 @@
           <a:lstStyle/>
           <a:p>
             <a:r>
-              <a:rPr lang="en-US" dirty="0"/>
+              <a:rPr lang="ar-SA" dirty="0">
+                <a:latin typeface="Amiri" pitchFamily="2" charset="-78"/>
+                <a:ea typeface="Amiri" pitchFamily="2" charset="-78"/>
+                <a:cs typeface="Amiri" pitchFamily="2" charset="-78"/>
+              </a:rPr>
               <a:t>ROLE PLAY C (Develop) — a class discussion.
 SET-UP IN THE BREAKOUT ROOM: A = examiner (reads the left column ONLY — the questions, in order), B = candidate (sees the task column; Core may use the help column), C = observer (ticks the feedback checklist). 1 minute preparation, about 3 minutes speaking, 1 minute feedback, then rotate.
 Task ! is the unexpected question: in the exam the candidate has not seen it — the examiner should read it without warning.
@@ -707,7 +711,11 @@
           <a:lstStyle/>
           <a:p>
             <a:r>
-              <a:rPr lang="en-US" dirty="0"/>
+              <a:rPr lang="ar-SA" dirty="0">
+                <a:latin typeface="Amiri" pitchFamily="2" charset="-78"/>
+                <a:ea typeface="Amiri" pitchFamily="2" charset="-78"/>
+                <a:cs typeface="Amiri" pitchFamily="2" charset="-78"/>
+              </a:rPr>
               <a:t>ROLE PLAY D (Stretch) — a school debate.
 SET-UP IN THE BREAKOUT ROOM: A = examiner (reads the left column ONLY — the questions, in order), B = candidate (sees the task column; Core may use the help column), C = observer (ticks the feedback checklist). 1 minute preparation, about 3 minutes speaking, 1 minute feedback, then rotate.
 Task ! is the unexpected question: in the exam the candidate has not seen it — the examiner should read it without warning.
@@ -1243,7 +1251,11 @@
           <a:lstStyle/>
           <a:p>
             <a:r>
-              <a:rPr lang="en-US" dirty="0"/>
+              <a:rPr lang="ar-SA" dirty="0">
+                <a:latin typeface="Amiri" pitchFamily="2" charset="-78"/>
+                <a:ea typeface="Amiri" pitchFamily="2" charset="-78"/>
+                <a:cs typeface="Amiri" pitchFamily="2" charset="-78"/>
+              </a:rPr>
               <a:t>TOPIC CONVERSATION — Core. Examiner asks the questions in order and may add “لِمَاذَا؟ / هَلْ يُمْكِنُ أَنْ تَشْرَحَ أَكْثَرَ؟” to push for more. Candidate aims for one full sentence per question.
 </a:t>
             </a:r>
@@ -1332,7 +1344,11 @@
           <a:lstStyle/>
           <a:p>
             <a:r>
-              <a:rPr lang="en-US" dirty="0"/>
+              <a:rPr lang="ar-SA" dirty="0">
+                <a:latin typeface="Amiri" pitchFamily="2" charset="-78"/>
+                <a:ea typeface="Amiri" pitchFamily="2" charset="-78"/>
+                <a:cs typeface="Amiri" pitchFamily="2" charset="-78"/>
+              </a:rPr>
               <a:t>TOPIC CONVERSATION — Develop. Examiner asks the questions in order and may add “لِمَاذَا؟ / هَلْ يُمْكِنُ أَنْ تَشْرَحَ أَكْثَرَ؟” to push for more. Candidate aims for two or three sentences, with baynamā or ammā … fa- and a hedge.
 </a:t>
             </a:r>
@@ -1421,7 +1437,11 @@
           <a:lstStyle/>
           <a:p>
             <a:r>
-              <a:rPr lang="en-US" dirty="0"/>
+              <a:rPr lang="ar-SA" dirty="0">
+                <a:latin typeface="Amiri" pitchFamily="2" charset="-78"/>
+                <a:ea typeface="Amiri" pitchFamily="2" charset="-78"/>
+                <a:cs typeface="Amiri" pitchFamily="2" charset="-78"/>
+              </a:rPr>
               <a:t>TOPIC CONVERSATION — Stretch. Examiner asks the questions in order and may add “لِمَاذَا؟ / هَلْ يُمْكِنُ أَنْ تَشْرَحَ أَكْثَرَ؟” to push for more. Candidate aims for a developed answer: opinion, balance, concession and a conditional.
 </a:t>
             </a:r>
@@ -1510,7 +1530,11 @@
           <a:lstStyle/>
           <a:p>
             <a:r>
-              <a:rPr lang="en-US" dirty="0"/>
+              <a:rPr lang="ar-SA" dirty="0">
+                <a:latin typeface="Amiri" pitchFamily="2" charset="-78"/>
+                <a:ea typeface="Amiri" pitchFamily="2" charset="-78"/>
+                <a:cs typeface="Amiri" pitchFamily="2" charset="-78"/>
+              </a:rPr>
               <a:t>WELCOME (1 min) — while students join.
 • Greet each student by name as they arrive: السَّلَامُ عَلَيْكُمْ. Take the register (Pastoral Tracker: attendance 0/1).
 • 2-MINUTE CHECK-IN (SEND training): a private chat to any student who seemed unsettled last lesson — “Are you okay today? 👍 / 👎”.
@@ -2224,7 +2248,11 @@
           <a:lstStyle/>
           <a:p>
             <a:r>
-              <a:rPr lang="en-US" dirty="0"/>
+              <a:rPr lang="ar-SA" dirty="0">
+                <a:latin typeface="Amiri" pitchFamily="2" charset="-78"/>
+                <a:ea typeface="Amiri" pitchFamily="2" charset="-78"/>
+                <a:cs typeface="Amiri" pitchFamily="2" charset="-78"/>
+              </a:rPr>
               <a:t>TEACH (3 min). Role play = precise and complete; conversation = develop. Choral repetition of the repair phrases. To a girl: تُعِيدِي.</a:t>
             </a:r>
             <a:endParaRPr lang="en-US" dirty="0"/>
@@ -2312,7 +2340,11 @@
           <a:lstStyle/>
           <a:p>
             <a:r>
-              <a:rPr lang="en-US" dirty="0"/>
+              <a:rPr lang="ar-SA" dirty="0">
+                <a:latin typeface="Amiri" pitchFamily="2" charset="-78"/>
+                <a:ea typeface="Amiri" pitchFamily="2" charset="-78"/>
+                <a:cs typeface="Amiri" pitchFamily="2" charset="-78"/>
+              </a:rPr>
               <a:t>LANGUAGE BANK (2 min) — afʿal min for simple adjectives (أَطْوَلُ مِنْ · أَبْكَرُ مِنْ); akthar / aqall + noun (acc.) for longer ones (أَكْثَرُ رَسْمِيَّةً · أَقَلُّ ازْدِحَامًا). Contrast: بَيْنَمَا + sentence; أَمَّا X فَهُوَ / فَهِيَ + comment.</a:t>
             </a:r>
             <a:endParaRPr lang="en-US" dirty="0"/>
@@ -2400,7 +2432,11 @@
           <a:lstStyle/>
           <a:p>
             <a:r>
-              <a:rPr lang="en-US" dirty="0"/>
+              <a:rPr lang="ar-SA" dirty="0">
+                <a:latin typeface="Amiri" pitchFamily="2" charset="-78"/>
+                <a:ea typeface="Amiri" pitchFamily="2" charset="-78"/>
+                <a:cs typeface="Amiri" pitchFamily="2" charset="-78"/>
+              </a:rPr>
               <a:t>LANGUAGE BANK (2 min) — soften claims: غَالِبًا · بَعْضُ النَّاسِ · فِي رَأْيِي · لَيْسَ الجَمِيعُ. Avoid "they are all …". Close with balance: مُخْتَلِفٌ لَا أَفْضَلُ · لِكُلٍّ مِنْهُمَا مَزَايَاهُ. Teacher note: reward hedging as top-band precision.</a:t>
             </a:r>
             <a:endParaRPr lang="en-US" dirty="0"/>
@@ -2576,7 +2612,11 @@
           <a:lstStyle/>
           <a:p>
             <a:r>
-              <a:rPr lang="en-US" dirty="0"/>
+              <a:rPr lang="ar-SA" dirty="0">
+                <a:latin typeface="Amiri" pitchFamily="2" charset="-78"/>
+                <a:ea typeface="Amiri" pitchFamily="2" charset="-78"/>
+                <a:cs typeface="Amiri" pitchFamily="2" charset="-78"/>
+              </a:rPr>
               <a:t>ROLE PLAY A (Core) — a video call.
 SET-UP IN THE BREAKOUT ROOM: A = examiner (reads the left column ONLY — the questions, in order), B = candidate (sees the task column; Core may use the help column), C = observer (ticks the feedback checklist). 1 minute preparation, about 3 minutes speaking, 1 minute feedback, then rotate.
 Task ! is the unexpected question: in the exam the candidate has not seen it — the examiner should read it without warning.
@@ -2668,7 +2708,11 @@
           <a:lstStyle/>
           <a:p>
             <a:r>
-              <a:rPr lang="en-US" dirty="0"/>
+              <a:rPr lang="ar-SA" dirty="0">
+                <a:latin typeface="Amiri" pitchFamily="2" charset="-78"/>
+                <a:ea typeface="Amiri" pitchFamily="2" charset="-78"/>
+                <a:cs typeface="Amiri" pitchFamily="2" charset="-78"/>
+              </a:rPr>
               <a:t>ROLE PLAY B (Core+) — a new classmate.
 SET-UP IN THE BREAKOUT ROOM: A = examiner (reads the left column ONLY — the questions, in order), B = candidate (sees the task column; Core may use the help column), C = observer (ticks the feedback checklist). 1 minute preparation, about 3 minutes speaking, 1 minute feedback, then rotate.
 Task ! is the unexpected question: in the exam the candidate has not seen it — the examiner should read it without warning.
@@ -3156,6 +3200,7 @@
                   <a:srgbClr val="D4AF37"/>
                 </a:solidFill>
                 <a:latin typeface="Amiri" pitchFamily="2" charset="-78"/>
+                <a:ea typeface="Amiri" pitchFamily="2" charset="-78"/>
                 <a:cs typeface="Amiri" pitchFamily="2" charset="-78"/>
               </a:rPr>
               <a:t>م</a:t>
@@ -3362,6 +3407,7 @@
                   <a:srgbClr val="D4AF37"/>
                 </a:solidFill>
                 <a:latin typeface="Amiri" pitchFamily="2" charset="-78"/>
+                <a:ea typeface="Amiri" pitchFamily="2" charset="-78"/>
                 <a:cs typeface="Amiri" pitchFamily="2" charset="-78"/>
               </a:rPr>
               <a:t>وَرْشَةُ التَّحَدُّثِ — المُقَارَنَةُ بَيْنَ الثَّقَافَاتِ بِاحْتِرَامٍ</a:t>
@@ -3413,6 +3459,7 @@
                   <a:srgbClr val="C6D2E6"/>
                 </a:solidFill>
                 <a:latin typeface="Amiri" pitchFamily="2" charset="-78"/>
+                <a:ea typeface="Amiri" pitchFamily="2" charset="-78"/>
                 <a:cs typeface="Amiri" pitchFamily="2" charset="-78"/>
               </a:rPr>
               <a:t>أَطْوَلُ مِنْ</a:t>
@@ -3439,6 +3486,7 @@
                   <a:srgbClr val="C6D2E6"/>
                 </a:solidFill>
                 <a:latin typeface="Amiri" pitchFamily="2" charset="-78"/>
+                <a:ea typeface="Amiri" pitchFamily="2" charset="-78"/>
                 <a:cs typeface="Amiri" pitchFamily="2" charset="-78"/>
               </a:rPr>
               <a:t>أَكْثَرُ … مِنْ</a:t>
@@ -3465,6 +3513,7 @@
                   <a:srgbClr val="C6D2E6"/>
                 </a:solidFill>
                 <a:latin typeface="Amiri" pitchFamily="2" charset="-78"/>
+                <a:ea typeface="Amiri" pitchFamily="2" charset="-78"/>
                 <a:cs typeface="Amiri" pitchFamily="2" charset="-78"/>
               </a:rPr>
               <a:t>بَيْنَمَا</a:t>
@@ -3491,6 +3540,7 @@
                   <a:srgbClr val="C6D2E6"/>
                 </a:solidFill>
                 <a:latin typeface="Amiri" pitchFamily="2" charset="-78"/>
+                <a:ea typeface="Amiri" pitchFamily="2" charset="-78"/>
                 <a:cs typeface="Amiri" pitchFamily="2" charset="-78"/>
               </a:rPr>
               <a:t>أَمَّا … فَإِنَّ</a:t>
@@ -3517,6 +3567,7 @@
                   <a:srgbClr val="C6D2E6"/>
                 </a:solidFill>
                 <a:latin typeface="Amiri" pitchFamily="2" charset="-78"/>
+                <a:ea typeface="Amiri" pitchFamily="2" charset="-78"/>
                 <a:cs typeface="Amiri" pitchFamily="2" charset="-78"/>
               </a:rPr>
               <a:t>غَالِبًا</a:t>
@@ -3543,6 +3594,7 @@
                   <a:srgbClr val="C6D2E6"/>
                 </a:solidFill>
                 <a:latin typeface="Amiri" pitchFamily="2" charset="-78"/>
+                <a:ea typeface="Amiri" pitchFamily="2" charset="-78"/>
                 <a:cs typeface="Amiri" pitchFamily="2" charset="-78"/>
               </a:rPr>
               <a:t>بَعْضُ النَّاسِ</a:t>
@@ -3569,6 +3621,7 @@
                   <a:srgbClr val="C6D2E6"/>
                 </a:solidFill>
                 <a:latin typeface="Amiri" pitchFamily="2" charset="-78"/>
+                <a:ea typeface="Amiri" pitchFamily="2" charset="-78"/>
                 <a:cs typeface="Amiri" pitchFamily="2" charset="-78"/>
               </a:rPr>
               <a:t>مُخْتَلِفٌ لَا أَفْضَلُ</a:t>
@@ -4001,6 +4054,7 @@
                   <a:srgbClr val="D4AF37"/>
                 </a:solidFill>
                 <a:latin typeface="Amiri" pitchFamily="2" charset="-78"/>
+                <a:ea typeface="Amiri" pitchFamily="2" charset="-78"/>
                 <a:cs typeface="Amiri" pitchFamily="2" charset="-78"/>
               </a:rPr>
               <a:t>م</a:t>
@@ -4321,6 +4375,7 @@
                   <a:srgbClr val="8A6D1E"/>
                 </a:solidFill>
                 <a:latin typeface="Amiri" pitchFamily="2" charset="-78"/>
+                <a:ea typeface="Amiri" pitchFamily="2" charset="-78"/>
                 <a:cs typeface="Amiri" pitchFamily="2" charset="-78"/>
               </a:rPr>
               <a:t>الحَيَاةُ العَائِلِيَّةُ فِي ثَقَافَتَيْنِ</a:t>
@@ -4601,6 +4656,7 @@
                   <a:srgbClr val="1B3B6F"/>
                 </a:solidFill>
                 <a:latin typeface="Amiri" pitchFamily="2" charset="-78"/>
+                <a:ea typeface="Amiri" pitchFamily="2" charset="-78"/>
                 <a:cs typeface="Amiri" pitchFamily="2" charset="-78"/>
               </a:rPr>
               <a:t>الأُسْرَةُ … غَالِبًا … أَمَّا … فَأَصْغَرُ …</a:t>
@@ -4677,6 +4733,7 @@
                   <a:srgbClr val="1B3B6F"/>
                 </a:solidFill>
                 <a:latin typeface="Amiri" pitchFamily="2" charset="-78"/>
+                <a:ea typeface="Amiri" pitchFamily="2" charset="-78"/>
                 <a:cs typeface="Amiri" pitchFamily="2" charset="-78"/>
               </a:rPr>
               <a:t>كَيْفَ تَخْتَلِفُ الأُسْرَةُ الصُّومَالِيَّةُ عَنِ البَرِيطَانِيَّةِ؟</a:t>
@@ -4780,6 +4837,7 @@
                   <a:srgbClr val="1B3B6F"/>
                 </a:solidFill>
                 <a:latin typeface="Amiri" pitchFamily="2" charset="-78"/>
+                <a:ea typeface="Amiri" pitchFamily="2" charset="-78"/>
                 <a:cs typeface="Amiri" pitchFamily="2" charset="-78"/>
               </a:rPr>
               <a:t>فِي بَيْتِنَا … بَيْنَمَا بَعْضُ أَصْدِقَائِي …</a:t>
@@ -4856,6 +4914,7 @@
                   <a:srgbClr val="1B3B6F"/>
                 </a:solidFill>
                 <a:latin typeface="Amiri" pitchFamily="2" charset="-78"/>
+                <a:ea typeface="Amiri" pitchFamily="2" charset="-78"/>
                 <a:cs typeface="Amiri" pitchFamily="2" charset="-78"/>
               </a:rPr>
               <a:t>وَالوَجَبَاتُ؟</a:t>
@@ -4959,6 +5018,7 @@
                   <a:srgbClr val="1B3B6F"/>
                 </a:solidFill>
                 <a:latin typeface="Amiri" pitchFamily="2" charset="-78"/>
+                <a:ea typeface="Amiri" pitchFamily="2" charset="-78"/>
                 <a:cs typeface="Amiri" pitchFamily="2" charset="-78"/>
               </a:rPr>
               <a:t>لَا أَقُولُ إِنَّ … ؛ لِكُلٍّ مِنْهُمَا …</a:t>
@@ -5035,6 +5095,7 @@
                   <a:srgbClr val="1B3B6F"/>
                 </a:solidFill>
                 <a:latin typeface="Amiri" pitchFamily="2" charset="-78"/>
+                <a:ea typeface="Amiri" pitchFamily="2" charset="-78"/>
                 <a:cs typeface="Amiri" pitchFamily="2" charset="-78"/>
               </a:rPr>
               <a:t>أَيُّهُمَا أَفْضَلُ فِي رَأْيِكَ؟</a:t>
@@ -5138,6 +5199,7 @@
                   <a:srgbClr val="1B3B6F"/>
                 </a:solidFill>
                 <a:latin typeface="Amiri" pitchFamily="2" charset="-78"/>
+                <a:ea typeface="Amiri" pitchFamily="2" charset="-78"/>
                 <a:cs typeface="Amiri" pitchFamily="2" charset="-78"/>
               </a:rPr>
               <a:t>كَانَ … أَمَّا الآنَ فَنَسْكُنُ …</a:t>
@@ -5214,6 +5276,7 @@
                   <a:srgbClr val="1B3B6F"/>
                 </a:solidFill>
                 <a:latin typeface="Amiri" pitchFamily="2" charset="-78"/>
+                <a:ea typeface="Amiri" pitchFamily="2" charset="-78"/>
                 <a:cs typeface="Amiri" pitchFamily="2" charset="-78"/>
               </a:rPr>
               <a:t>هَلْ تَغَيَّرَتْ أُسْرَتُكَ بَعْدَ الهِجْرَةِ؟</a:t>
@@ -5317,6 +5380,7 @@
                   <a:srgbClr val="1B3B6F"/>
                 </a:solidFill>
                 <a:latin typeface="Amiri" pitchFamily="2" charset="-78"/>
+                <a:ea typeface="Amiri" pitchFamily="2" charset="-78"/>
                 <a:cs typeface="Amiri" pitchFamily="2" charset="-78"/>
               </a:rPr>
               <a:t>آخُذُ مِنَ … ، وَمِنَ … </a:t>
@@ -5393,6 +5457,7 @@
                   <a:srgbClr val="1B3B6F"/>
                 </a:solidFill>
                 <a:latin typeface="Amiri" pitchFamily="2" charset="-78"/>
+                <a:ea typeface="Amiri" pitchFamily="2" charset="-78"/>
                 <a:cs typeface="Amiri" pitchFamily="2" charset="-78"/>
               </a:rPr>
               <a:t>مَا الشَّيْءُ الَّذِي تَأْخُذُهُ مِنْ كُلِّ ثَقَافَةٍ؟</a:t>
@@ -5602,6 +5667,7 @@
                   <a:srgbClr val="D4AF37"/>
                 </a:solidFill>
                 <a:latin typeface="Amiri" pitchFamily="2" charset="-78"/>
+                <a:ea typeface="Amiri" pitchFamily="2" charset="-78"/>
                 <a:cs typeface="Amiri" pitchFamily="2" charset="-78"/>
               </a:rPr>
               <a:t>م</a:t>
@@ -5922,6 +5988,7 @@
                   <a:srgbClr val="8A6D1E"/>
                 </a:solidFill>
                 <a:latin typeface="Amiri" pitchFamily="2" charset="-78"/>
+                <a:ea typeface="Amiri" pitchFamily="2" charset="-78"/>
                 <a:cs typeface="Amiri" pitchFamily="2" charset="-78"/>
               </a:rPr>
               <a:t>هَلْ هُنَاكَ ثَقَافَةٌ أَفْضَلُ مِنْ غَيْرِهَا؟</a:t>
@@ -6202,6 +6269,7 @@
                   <a:srgbClr val="1B3B6F"/>
                 </a:solidFill>
                 <a:latin typeface="Amiri" pitchFamily="2" charset="-78"/>
+                <a:ea typeface="Amiri" pitchFamily="2" charset="-78"/>
                 <a:cs typeface="Amiri" pitchFamily="2" charset="-78"/>
               </a:rPr>
               <a:t>أَرَى أَنَّ … غَيْرَ أَنَّ …</a:t>
@@ -6278,6 +6346,7 @@
                   <a:srgbClr val="1B3B6F"/>
                 </a:solidFill>
                 <a:latin typeface="Amiri" pitchFamily="2" charset="-78"/>
+                <a:ea typeface="Amiri" pitchFamily="2" charset="-78"/>
                 <a:cs typeface="Amiri" pitchFamily="2" charset="-78"/>
               </a:rPr>
               <a:t>هَلْ يُمْكِنُ أَنْ نَقُولَ إِنَّ ثَقَافَةً أَفْضَلُ مِنْ أُخْرَى؟</a:t>
@@ -6381,6 +6450,7 @@
                   <a:srgbClr val="1B3B6F"/>
                 </a:solidFill>
                 <a:latin typeface="Amiri" pitchFamily="2" charset="-78"/>
+                <a:ea typeface="Amiri" pitchFamily="2" charset="-78"/>
                 <a:cs typeface="Amiri" pitchFamily="2" charset="-78"/>
               </a:rPr>
               <a:t>مَثَلًا، … يَظُنُّ … بَيْنَمَا الحَقِيقَةُ …</a:t>
@@ -6457,6 +6527,7 @@
                   <a:srgbClr val="1B3B6F"/>
                 </a:solidFill>
                 <a:latin typeface="Amiri" pitchFamily="2" charset="-78"/>
+                <a:ea typeface="Amiri" pitchFamily="2" charset="-78"/>
                 <a:cs typeface="Amiri" pitchFamily="2" charset="-78"/>
               </a:rPr>
               <a:t>أَعْطِنَا مِثَالًا عَلَى سُوءِ مُقَارَنَةٍ.</a:t>
@@ -6560,6 +6631,7 @@
                   <a:srgbClr val="1B3B6F"/>
                 </a:solidFill>
                 <a:latin typeface="Amiri" pitchFamily="2" charset="-78"/>
+                <a:ea typeface="Amiri" pitchFamily="2" charset="-78"/>
                 <a:cs typeface="Amiri" pitchFamily="2" charset="-78"/>
               </a:rPr>
               <a:t>صَحِيحٌ أَنَّ … بِشَرْطِ أَنْ …</a:t>
@@ -6636,6 +6708,7 @@
                   <a:srgbClr val="1B3B6F"/>
                 </a:solidFill>
                 <a:latin typeface="Amiri" pitchFamily="2" charset="-78"/>
+                <a:ea typeface="Amiri" pitchFamily="2" charset="-78"/>
                 <a:cs typeface="Amiri" pitchFamily="2" charset="-78"/>
               </a:rPr>
               <a:t>لٰكِنَّ المُقَارَنَةَ تُسَاعِدُنَا عَلَى التَّعَلُّمِ.</a:t>
@@ -6739,6 +6812,7 @@
                   <a:srgbClr val="1B3B6F"/>
                 </a:solidFill>
                 <a:latin typeface="Amiri" pitchFamily="2" charset="-78"/>
+                <a:ea typeface="Amiri" pitchFamily="2" charset="-78"/>
                 <a:cs typeface="Amiri" pitchFamily="2" charset="-78"/>
               </a:rPr>
               <a:t>عِنْدَمَا … كُنْتُ أَظُنُّ … ثُمَّ …</a:t>
@@ -6815,6 +6889,7 @@
                   <a:srgbClr val="1B3B6F"/>
                 </a:solidFill>
                 <a:latin typeface="Amiri" pitchFamily="2" charset="-78"/>
+                <a:ea typeface="Amiri" pitchFamily="2" charset="-78"/>
                 <a:cs typeface="Amiri" pitchFamily="2" charset="-78"/>
               </a:rPr>
               <a:t>كَيْفَ تُطَبِّقُ هٰذَا فِي حَيَاتِكَ؟</a:t>
@@ -6918,6 +6993,7 @@
                   <a:srgbClr val="1B3B6F"/>
                 </a:solidFill>
                 <a:latin typeface="Amiri" pitchFamily="2" charset="-78"/>
+                <a:ea typeface="Amiri" pitchFamily="2" charset="-78"/>
                 <a:cs typeface="Amiri" pitchFamily="2" charset="-78"/>
               </a:rPr>
               <a:t>لَوْ كَتَبْتُ قَاعِدَةً، لَكَانَتْ: "…"</a:t>
@@ -6997,6 +7073,7 @@
                   <a:srgbClr val="1B3B6F"/>
                 </a:solidFill>
                 <a:latin typeface="Amiri" pitchFamily="2" charset="-78"/>
+                <a:ea typeface="Amiri" pitchFamily="2" charset="-78"/>
                 <a:cs typeface="Amiri" pitchFamily="2" charset="-78"/>
               </a:rPr>
               <a:t>لَوْ كَتَبْتَ قَاعِدَةً وَاحِدَةً لِلْمُقَارَنَةِ بَيْنَ الثَّقَافَاتِ، فَمَا هِيَ؟</a:t>
@@ -7206,6 +7283,7 @@
                   <a:srgbClr val="D4AF37"/>
                 </a:solidFill>
                 <a:latin typeface="Amiri" pitchFamily="2" charset="-78"/>
+                <a:ea typeface="Amiri" pitchFamily="2" charset="-78"/>
                 <a:cs typeface="Amiri" pitchFamily="2" charset="-78"/>
               </a:rPr>
               <a:t>م</a:t>
@@ -7526,6 +7604,7 @@
                   <a:srgbClr val="8A6D1E"/>
                 </a:solidFill>
                 <a:latin typeface="Amiri" pitchFamily="2" charset="-78"/>
+                <a:ea typeface="Amiri" pitchFamily="2" charset="-78"/>
                 <a:cs typeface="Amiri" pitchFamily="2" charset="-78"/>
               </a:rPr>
               <a:t>وَرَقَةُ المُلَاحِظِ</a:t>
@@ -8996,6 +9075,7 @@
                   <a:srgbClr val="D4AF37"/>
                 </a:solidFill>
                 <a:latin typeface="Amiri" pitchFamily="2" charset="-78"/>
+                <a:ea typeface="Amiri" pitchFamily="2" charset="-78"/>
                 <a:cs typeface="Amiri" pitchFamily="2" charset="-78"/>
               </a:rPr>
               <a:t>م</a:t>
@@ -9316,6 +9396,7 @@
                   <a:srgbClr val="8A6D1E"/>
                 </a:solidFill>
                 <a:latin typeface="Amiri" pitchFamily="2" charset="-78"/>
+                <a:ea typeface="Amiri" pitchFamily="2" charset="-78"/>
                 <a:cs typeface="Amiri" pitchFamily="2" charset="-78"/>
               </a:rPr>
               <a:t>نَمُوذَجُ الإِجَابَةِ</a:t>
@@ -9558,6 +9639,7 @@
                   <a:srgbClr val="1B3B6F"/>
                 </a:solidFill>
                 <a:latin typeface="Amiri" pitchFamily="2" charset="-78"/>
+                <a:ea typeface="Amiri" pitchFamily="2" charset="-78"/>
                 <a:cs typeface="Amiri" pitchFamily="2" charset="-78"/>
               </a:rPr>
               <a:t>يَبْدَأُ فِي السَّاعَةِ الثَّامِنَةِ وَالنِّصْفِ.</a:t>
@@ -9634,6 +9716,7 @@
                   <a:srgbClr val="1B3B6F"/>
                 </a:solidFill>
                 <a:latin typeface="Amiri" pitchFamily="2" charset="-78"/>
+                <a:ea typeface="Amiri" pitchFamily="2" charset="-78"/>
                 <a:cs typeface="Amiri" pitchFamily="2" charset="-78"/>
               </a:rPr>
               <a:t>مَتَى يَبْدَأُ يَوْمُكَ الدِّرَاسِيُّ؟</a:t>
@@ -9737,6 +9820,7 @@
                   <a:srgbClr val="1B3B6F"/>
                 </a:solidFill>
                 <a:latin typeface="Amiri" pitchFamily="2" charset="-78"/>
+                <a:ea typeface="Amiri" pitchFamily="2" charset="-78"/>
                 <a:cs typeface="Amiri" pitchFamily="2" charset="-78"/>
               </a:rPr>
               <a:t>يَوْمُكُمْ أَبْكَرُ مِنْ يَوْمِنَا!</a:t>
@@ -9813,6 +9897,7 @@
                   <a:srgbClr val="1B3B6F"/>
                 </a:solidFill>
                 <a:latin typeface="Amiri" pitchFamily="2" charset="-78"/>
+                <a:ea typeface="Amiri" pitchFamily="2" charset="-78"/>
                 <a:cs typeface="Amiri" pitchFamily="2" charset="-78"/>
               </a:rPr>
               <a:t>نَحْنُ نَبْدَأُ فِي السَّابِعَةِ!</a:t>
@@ -9916,6 +10001,7 @@
                   <a:srgbClr val="1B3B6F"/>
                 </a:solidFill>
                 <a:latin typeface="Amiri" pitchFamily="2" charset="-78"/>
+                <a:ea typeface="Amiri" pitchFamily="2" charset="-78"/>
                 <a:cs typeface="Amiri" pitchFamily="2" charset="-78"/>
               </a:rPr>
               <a:t>السَّبْتُ وَالأَحَدُ.</a:t>
@@ -9992,6 +10078,7 @@
                   <a:srgbClr val="1B3B6F"/>
                 </a:solidFill>
                 <a:latin typeface="Amiri" pitchFamily="2" charset="-78"/>
+                <a:ea typeface="Amiri" pitchFamily="2" charset="-78"/>
                 <a:cs typeface="Amiri" pitchFamily="2" charset="-78"/>
               </a:rPr>
               <a:t>مَا أَيَّامُ العُطْلَةِ عِنْدَكُمْ؟</a:t>
@@ -10095,6 +10182,7 @@
                   <a:srgbClr val="1B3B6F"/>
                 </a:solidFill>
                 <a:latin typeface="Amiri" pitchFamily="2" charset="-78"/>
+                <a:ea typeface="Amiri" pitchFamily="2" charset="-78"/>
                 <a:cs typeface="Amiri" pitchFamily="2" charset="-78"/>
               </a:rPr>
               <a:t>هَلْ تَلْبَسُونَ زِيًّا مَدْرَسِيًّا؟</a:t>
@@ -10171,6 +10259,7 @@
                   <a:srgbClr val="1B3B6F"/>
                 </a:solidFill>
                 <a:latin typeface="Amiri" pitchFamily="2" charset="-78"/>
+                <a:ea typeface="Amiri" pitchFamily="2" charset="-78"/>
                 <a:cs typeface="Amiri" pitchFamily="2" charset="-78"/>
               </a:rPr>
               <a:t>عُطْلَتُنَا الجُمُعَةُ وَالسَّبْتُ.</a:t>
@@ -10274,6 +10363,7 @@
                   <a:srgbClr val="1B3B6F"/>
                 </a:solidFill>
                 <a:latin typeface="Amiri" pitchFamily="2" charset="-78"/>
+                <a:ea typeface="Amiri" pitchFamily="2" charset="-78"/>
                 <a:cs typeface="Amiri" pitchFamily="2" charset="-78"/>
               </a:rPr>
               <a:t>أُحِبُّ النَّوَادِيَ بَعْدَ المَدْرَسَةِ، لِأَنَّهَا مُمْتِعَةٌ.</a:t>
@@ -10350,6 +10440,7 @@
                   <a:srgbClr val="1B3B6F"/>
                 </a:solidFill>
                 <a:latin typeface="Amiri" pitchFamily="2" charset="-78"/>
+                <a:ea typeface="Amiri" pitchFamily="2" charset="-78"/>
                 <a:cs typeface="Amiri" pitchFamily="2" charset="-78"/>
               </a:rPr>
               <a:t>نَعَمْ. مَا الشَّيْءُ الَّذِي تُحِبُّهُ فِي مَدْرَسَتِكَ؟</a:t>
@@ -10559,6 +10650,7 @@
                   <a:srgbClr val="D4AF37"/>
                 </a:solidFill>
                 <a:latin typeface="Amiri" pitchFamily="2" charset="-78"/>
+                <a:ea typeface="Amiri" pitchFamily="2" charset="-78"/>
                 <a:cs typeface="Amiri" pitchFamily="2" charset="-78"/>
               </a:rPr>
               <a:t>م</a:t>
@@ -10879,6 +10971,7 @@
                   <a:srgbClr val="8A6D1E"/>
                 </a:solidFill>
                 <a:latin typeface="Amiri" pitchFamily="2" charset="-78"/>
+                <a:ea typeface="Amiri" pitchFamily="2" charset="-78"/>
                 <a:cs typeface="Amiri" pitchFamily="2" charset="-78"/>
               </a:rPr>
               <a:t>نَمُوذَجُ الإِجَابَةِ</a:t>
@@ -11121,6 +11214,7 @@
                   <a:srgbClr val="1B3B6F"/>
                 </a:solidFill>
                 <a:latin typeface="Amiri" pitchFamily="2" charset="-78"/>
+                <a:ea typeface="Amiri" pitchFamily="2" charset="-78"/>
                 <a:cs typeface="Amiri" pitchFamily="2" charset="-78"/>
               </a:rPr>
               <a:t>كَيْفَ هِيَ مُخْتَلِفَةٌ؟</a:t>
@@ -11197,6 +11291,7 @@
                   <a:srgbClr val="1B3B6F"/>
                 </a:solidFill>
                 <a:latin typeface="Amiri" pitchFamily="2" charset="-78"/>
+                <a:ea typeface="Amiri" pitchFamily="2" charset="-78"/>
                 <a:cs typeface="Amiri" pitchFamily="2" charset="-78"/>
               </a:rPr>
               <a:t>المَدْرَسَةُ هُنَا مُخْتَلِفَةٌ جِدًّا!</a:t>
@@ -11300,6 +11395,7 @@
                   <a:srgbClr val="1B3B6F"/>
                 </a:solidFill>
                 <a:latin typeface="Amiri" pitchFamily="2" charset="-78"/>
+                <a:ea typeface="Amiri" pitchFamily="2" charset="-78"/>
                 <a:cs typeface="Amiri" pitchFamily="2" charset="-78"/>
               </a:rPr>
               <a:t>صَحِيحٌ، وَالدُّرُوسُ هُنَا أَقْصَرُ مِنْ دُرُوسِ سُورِيَا كَمَا سَمِعْتُ.</a:t>
@@ -11376,6 +11472,7 @@
                   <a:srgbClr val="1B3B6F"/>
                 </a:solidFill>
                 <a:latin typeface="Amiri" pitchFamily="2" charset="-78"/>
+                <a:ea typeface="Amiri" pitchFamily="2" charset="-78"/>
                 <a:cs typeface="Amiri" pitchFamily="2" charset="-78"/>
               </a:rPr>
               <a:t>الصُّفُوفُ هُنَا أَصْغَرُ، وَالمُعَلِّمُونَ يَمْشُونَ بَيْنَ الطُّلَّابِ.</a:t>
@@ -11479,6 +11576,7 @@
                   <a:srgbClr val="1B3B6F"/>
                 </a:solidFill>
                 <a:latin typeface="Amiri" pitchFamily="2" charset="-78"/>
+                <a:ea typeface="Amiri" pitchFamily="2" charset="-78"/>
                 <a:cs typeface="Amiri" pitchFamily="2" charset="-78"/>
               </a:rPr>
               <a:t>نَعَمْ، هُنَا نَقُولُ "مِسْتَر" مَعَ الاسْمِ، بَيْنَمَا تَقُولُونَ "أُسْتَاذ"؛ وَكِلَاهُمَا احْتِرَامٌ.</a:t>
@@ -11555,6 +11653,7 @@
                   <a:srgbClr val="1B3B6F"/>
                 </a:solidFill>
                 <a:latin typeface="Amiri" pitchFamily="2" charset="-78"/>
+                <a:ea typeface="Amiri" pitchFamily="2" charset="-78"/>
                 <a:cs typeface="Amiri" pitchFamily="2" charset="-78"/>
               </a:rPr>
               <a:t>وَالطُّلَّابُ يُنَادُونَ المُعَلِّمَ بِاسْمِهِ!</a:t>
@@ -11658,6 +11757,7 @@
                   <a:srgbClr val="1B3B6F"/>
                 </a:solidFill>
                 <a:latin typeface="Amiri" pitchFamily="2" charset="-78"/>
+                <a:ea typeface="Amiri" pitchFamily="2" charset="-78"/>
                 <a:cs typeface="Amiri" pitchFamily="2" charset="-78"/>
               </a:rPr>
               <a:t>طَبْعًا! سَأُرِيكَ المَكْتَبَةَ وَالمَطْعَمَ. وَمَا المَادَّةُ الَّتِي تُحِبُّهَا أَكْثَرَ؟</a:t>
@@ -11734,6 +11834,7 @@
                   <a:srgbClr val="1B3B6F"/>
                 </a:solidFill>
                 <a:latin typeface="Amiri" pitchFamily="2" charset="-78"/>
+                <a:ea typeface="Amiri" pitchFamily="2" charset="-78"/>
                 <a:cs typeface="Amiri" pitchFamily="2" charset="-78"/>
               </a:rPr>
               <a:t>هَلْ يُمْكِنُكَ أَنْ تُسَاعِدَنِي؟</a:t>
@@ -11837,6 +11938,7 @@
                   <a:srgbClr val="1B3B6F"/>
                 </a:solidFill>
                 <a:latin typeface="Amiri" pitchFamily="2" charset="-78"/>
+                <a:ea typeface="Amiri" pitchFamily="2" charset="-78"/>
                 <a:cs typeface="Amiri" pitchFamily="2" charset="-78"/>
               </a:rPr>
               <a:t>لَيْسَ الجَمِيعُ هٰكَذَا؛ غَالِبًا يَحْتَاجُ النَّاسُ هُنَا إِلَى وَقْتٍ، لٰكِنَّهُمْ أَصْدِقَاءُ أَوْفِيَاءُ بَعْدَ ذٰلِكَ.</a:t>
@@ -11913,6 +12015,7 @@
                   <a:srgbClr val="1B3B6F"/>
                 </a:solidFill>
                 <a:latin typeface="Amiri" pitchFamily="2" charset="-78"/>
+                <a:ea typeface="Amiri" pitchFamily="2" charset="-78"/>
                 <a:cs typeface="Amiri" pitchFamily="2" charset="-78"/>
               </a:rPr>
               <a:t>الرِّيَاضِيَّاتُ. هَلِ النَّاسُ هُنَا بَارِدُونَ كَمَا يُقَالُ؟</a:t>
@@ -12122,6 +12225,7 @@
                   <a:srgbClr val="D4AF37"/>
                 </a:solidFill>
                 <a:latin typeface="Amiri" pitchFamily="2" charset="-78"/>
+                <a:ea typeface="Amiri" pitchFamily="2" charset="-78"/>
                 <a:cs typeface="Amiri" pitchFamily="2" charset="-78"/>
               </a:rPr>
               <a:t>م</a:t>
@@ -12442,6 +12546,7 @@
                   <a:srgbClr val="8A6D1E"/>
                 </a:solidFill>
                 <a:latin typeface="Amiri" pitchFamily="2" charset="-78"/>
+                <a:ea typeface="Amiri" pitchFamily="2" charset="-78"/>
                 <a:cs typeface="Amiri" pitchFamily="2" charset="-78"/>
               </a:rPr>
               <a:t>نَمُوذَجُ الإِجَابَةِ</a:t>
@@ -12684,6 +12789,7 @@
                   <a:srgbClr val="1B3B6F"/>
                 </a:solidFill>
                 <a:latin typeface="Amiri" pitchFamily="2" charset="-78"/>
+                <a:ea typeface="Amiri" pitchFamily="2" charset="-78"/>
                 <a:cs typeface="Amiri" pitchFamily="2" charset="-78"/>
               </a:rPr>
               <a:t>الأُسْرَةُ الصُّومَالِيَّةُ غَالِبًا أَكْبَرُ، وَيَسْكُنُ الأَجْدَادُ مَعَ أَحْفَادِهِمْ، أَمَّا الأُسْرَةُ البَرِيطَانِيَّةُ فَأَصْغَرُ عَادَةً، وَيَعِيشُ الأَجْدَادُ وَحْدَهُمْ.</a:t>
@@ -12760,6 +12866,7 @@
                   <a:srgbClr val="1B3B6F"/>
                 </a:solidFill>
                 <a:latin typeface="Amiri" pitchFamily="2" charset="-78"/>
+                <a:ea typeface="Amiri" pitchFamily="2" charset="-78"/>
                 <a:cs typeface="Amiri" pitchFamily="2" charset="-78"/>
               </a:rPr>
               <a:t>كَيْفَ تَخْتَلِفُ الأُسْرَةُ الصُّومَالِيَّةُ عَنِ البَرِيطَانِيَّةِ؟</a:t>
@@ -12863,6 +12970,7 @@
                   <a:srgbClr val="1B3B6F"/>
                 </a:solidFill>
                 <a:latin typeface="Amiri" pitchFamily="2" charset="-78"/>
+                <a:ea typeface="Amiri" pitchFamily="2" charset="-78"/>
                 <a:cs typeface="Amiri" pitchFamily="2" charset="-78"/>
               </a:rPr>
               <a:t>فِي بَيْتِنَا نَأْكُلُ العَشَاءَ مَعًا دَائِمًا، بَيْنَمَا يَأْكُلُ بَعْضُ أَصْدِقَائِي فِي أَوْقَاتٍ مُخْتَلِفَةٍ بِسَبَبِ عَمَلِ وَالِدِيهِمْ.</a:t>
@@ -12939,6 +13047,7 @@
                   <a:srgbClr val="1B3B6F"/>
                 </a:solidFill>
                 <a:latin typeface="Amiri" pitchFamily="2" charset="-78"/>
+                <a:ea typeface="Amiri" pitchFamily="2" charset="-78"/>
                 <a:cs typeface="Amiri" pitchFamily="2" charset="-78"/>
               </a:rPr>
               <a:t>وَالوَجَبَاتُ؟</a:t>
@@ -13042,6 +13151,7 @@
                   <a:srgbClr val="1B3B6F"/>
                 </a:solidFill>
                 <a:latin typeface="Amiri" pitchFamily="2" charset="-78"/>
+                <a:ea typeface="Amiri" pitchFamily="2" charset="-78"/>
                 <a:cs typeface="Amiri" pitchFamily="2" charset="-78"/>
               </a:rPr>
               <a:t>لَا أَقُولُ إِنَّ إِحْدَاهُمَا أَفْضَلُ؛ فَالأُسْرَةُ الكَبِيرَةُ تُعْطِي دَعْمًا أَكْثَرَ، وَالصَّغِيرَةُ تُعْطِي حُرِّيَّةً أَكْبَرَ.</a:t>
@@ -13118,6 +13228,7 @@
                   <a:srgbClr val="1B3B6F"/>
                 </a:solidFill>
                 <a:latin typeface="Amiri" pitchFamily="2" charset="-78"/>
+                <a:ea typeface="Amiri" pitchFamily="2" charset="-78"/>
                 <a:cs typeface="Amiri" pitchFamily="2" charset="-78"/>
               </a:rPr>
               <a:t>أَيُّهُمَا أَفْضَلُ فِي رَأْيِكَ؟</a:t>
@@ -13221,6 +13332,7 @@
                   <a:srgbClr val="1B3B6F"/>
                 </a:solidFill>
                 <a:latin typeface="Amiri" pitchFamily="2" charset="-78"/>
+                <a:ea typeface="Amiri" pitchFamily="2" charset="-78"/>
                 <a:cs typeface="Amiri" pitchFamily="2" charset="-78"/>
               </a:rPr>
               <a:t>كَانَ جَدِّي يَعِيشُ مَعَ ثَلَاثِينَ قَرِيبًا فِي بَيْتٍ وَاحِدٍ، أَمَّا الآنَ فَنَسْكُنُ فِي شُقَّةٍ صَغِيرَةٍ، لٰكِنَّنَا نَجْتَمِعُ كُلَّ عُطْلَةٍ.</a:t>
@@ -13297,6 +13409,7 @@
                   <a:srgbClr val="1B3B6F"/>
                 </a:solidFill>
                 <a:latin typeface="Amiri" pitchFamily="2" charset="-78"/>
+                <a:ea typeface="Amiri" pitchFamily="2" charset="-78"/>
                 <a:cs typeface="Amiri" pitchFamily="2" charset="-78"/>
               </a:rPr>
               <a:t>هَلْ تَغَيَّرَتْ أُسْرَتُكَ بَعْدَ الهِجْرَةِ؟</a:t>
@@ -13400,6 +13513,7 @@
                   <a:srgbClr val="1B3B6F"/>
                 </a:solidFill>
                 <a:latin typeface="Amiri" pitchFamily="2" charset="-78"/>
+                <a:ea typeface="Amiri" pitchFamily="2" charset="-78"/>
                 <a:cs typeface="Amiri" pitchFamily="2" charset="-78"/>
               </a:rPr>
               <a:t>آخُذُ مِنَ الثَّقَافَةِ الصُّومَالِيَّةِ الكَرَمَ وَقُرْبَ العَائِلَةِ، وَمِنَ البَرِيطَانِيَّةِ احْتِرَامَ الوَقْتِ وَالطَّابُورِ!</a:t>
@@ -13476,6 +13590,7 @@
                   <a:srgbClr val="1B3B6F"/>
                 </a:solidFill>
                 <a:latin typeface="Amiri" pitchFamily="2" charset="-78"/>
+                <a:ea typeface="Amiri" pitchFamily="2" charset="-78"/>
                 <a:cs typeface="Amiri" pitchFamily="2" charset="-78"/>
               </a:rPr>
               <a:t>مَا الشَّيْءُ الَّذِي تَأْخُذُهُ مِنْ كُلِّ ثَقَافَةٍ؟</a:t>
@@ -13685,6 +13800,7 @@
                   <a:srgbClr val="D4AF37"/>
                 </a:solidFill>
                 <a:latin typeface="Amiri" pitchFamily="2" charset="-78"/>
+                <a:ea typeface="Amiri" pitchFamily="2" charset="-78"/>
                 <a:cs typeface="Amiri" pitchFamily="2" charset="-78"/>
               </a:rPr>
               <a:t>م</a:t>
@@ -14005,6 +14121,7 @@
                   <a:srgbClr val="8A6D1E"/>
                 </a:solidFill>
                 <a:latin typeface="Amiri" pitchFamily="2" charset="-78"/>
+                <a:ea typeface="Amiri" pitchFamily="2" charset="-78"/>
                 <a:cs typeface="Amiri" pitchFamily="2" charset="-78"/>
               </a:rPr>
               <a:t>نَمُوذَجُ الإِجَابَةِ</a:t>
@@ -14247,6 +14364,7 @@
                   <a:srgbClr val="1B3B6F"/>
                 </a:solidFill>
                 <a:latin typeface="Amiri" pitchFamily="2" charset="-78"/>
+                <a:ea typeface="Amiri" pitchFamily="2" charset="-78"/>
                 <a:cs typeface="Amiri" pitchFamily="2" charset="-78"/>
               </a:rPr>
               <a:t>أَرَى أَنَّ الثَّقَافَاتِ مُخْتَلِفَةٌ لَا مُتَفَاضِلَةٌ، غَيْرَ أَنَّ بَعْضَ القِيَمِ، كَالعَدْلِ وَالرَّحْمَةِ، يَجِبُ أَنْ تَكُونَ مِعْيَارًا لِلْجَمِيعِ.</a:t>
@@ -14323,6 +14441,7 @@
                   <a:srgbClr val="1B3B6F"/>
                 </a:solidFill>
                 <a:latin typeface="Amiri" pitchFamily="2" charset="-78"/>
+                <a:ea typeface="Amiri" pitchFamily="2" charset="-78"/>
                 <a:cs typeface="Amiri" pitchFamily="2" charset="-78"/>
               </a:rPr>
               <a:t>هَلْ يُمْكِنُ أَنْ نَقُولَ إِنَّ ثَقَافَةً أَفْضَلُ مِنْ أُخْرَى؟</a:t>
@@ -14429,6 +14548,7 @@
                   <a:srgbClr val="1B3B6F"/>
                 </a:solidFill>
                 <a:latin typeface="Amiri" pitchFamily="2" charset="-78"/>
+                <a:ea typeface="Amiri" pitchFamily="2" charset="-78"/>
                 <a:cs typeface="Amiri" pitchFamily="2" charset="-78"/>
               </a:rPr>
               <a:t>مَثَلًا، قَدْ يَظُنُّ زَائِرٌ أَنَّ النَّاسَ فِي بَلَدٍ عَرَبِيٍّ غَيْرُ مُنَظَّمِينَ لِأَنَّ المَوَاعِيدَ مَرِنَةٌ، بَيْنَمَا الحَقِيقَةُ أَنَّهُمْ يُقَدِّمُونَ العَلَاقَاتِ عَلَى السَّاعَةِ.</a:t>
@@ -14505,6 +14625,7 @@
                   <a:srgbClr val="1B3B6F"/>
                 </a:solidFill>
                 <a:latin typeface="Amiri" pitchFamily="2" charset="-78"/>
+                <a:ea typeface="Amiri" pitchFamily="2" charset="-78"/>
                 <a:cs typeface="Amiri" pitchFamily="2" charset="-78"/>
               </a:rPr>
               <a:t>أَعْطِنَا مِثَالًا عَلَى سُوءِ مُقَارَنَةٍ.</a:t>
@@ -14608,6 +14729,7 @@
                   <a:srgbClr val="1B3B6F"/>
                 </a:solidFill>
                 <a:latin typeface="Amiri" pitchFamily="2" charset="-78"/>
+                <a:ea typeface="Amiri" pitchFamily="2" charset="-78"/>
                 <a:cs typeface="Amiri" pitchFamily="2" charset="-78"/>
               </a:rPr>
               <a:t>صَحِيحٌ أَنَّهَا مُفِيدَةٌ، بِشَرْطِ أَنْ نُقَارِنَ لِنَفْهَمَ لَا لِنَحْكُمَ، وَأَنْ نَسْأَلَ أَهْلَ الثَّقَافَةِ أَنْفُسَهُمْ قَبْلَ أَنْ نَسْتَنْتِجَ.</a:t>
@@ -14684,6 +14806,7 @@
                   <a:srgbClr val="1B3B6F"/>
                 </a:solidFill>
                 <a:latin typeface="Amiri" pitchFamily="2" charset="-78"/>
+                <a:ea typeface="Amiri" pitchFamily="2" charset="-78"/>
                 <a:cs typeface="Amiri" pitchFamily="2" charset="-78"/>
               </a:rPr>
               <a:t>لٰكِنَّ المُقَارَنَةَ تُسَاعِدُنَا عَلَى التَّعَلُّمِ.</a:t>
@@ -14787,6 +14910,7 @@
                   <a:srgbClr val="1B3B6F"/>
                 </a:solidFill>
                 <a:latin typeface="Amiri" pitchFamily="2" charset="-78"/>
+                <a:ea typeface="Amiri" pitchFamily="2" charset="-78"/>
                 <a:cs typeface="Amiri" pitchFamily="2" charset="-78"/>
               </a:rPr>
               <a:t>عِنْدَمَا زَارَنِي صَدِيقٌ يَابَانِيٌّ، كُنْتُ أَظُنُّ أَنَّهُ بَارِدٌ لِأَنَّهُ لَا يُعَانِقُ، ثُمَّ فَهِمْتُ أَنَّ الانْحِنَاءَ عِنْدَهُمْ تَعْبِيرٌ أَعْمَقُ عَنِ الاحْتِرَامِ.</a:t>
@@ -14863,6 +14987,7 @@
                   <a:srgbClr val="1B3B6F"/>
                 </a:solidFill>
                 <a:latin typeface="Amiri" pitchFamily="2" charset="-78"/>
+                <a:ea typeface="Amiri" pitchFamily="2" charset="-78"/>
                 <a:cs typeface="Amiri" pitchFamily="2" charset="-78"/>
               </a:rPr>
               <a:t>كَيْفَ تُطَبِّقُ هٰذَا فِي حَيَاتِكَ؟</a:t>
@@ -14966,6 +15091,7 @@
                   <a:srgbClr val="1B3B6F"/>
                 </a:solidFill>
                 <a:latin typeface="Amiri" pitchFamily="2" charset="-78"/>
+                <a:ea typeface="Amiri" pitchFamily="2" charset="-78"/>
                 <a:cs typeface="Amiri" pitchFamily="2" charset="-78"/>
               </a:rPr>
               <a:t>لَوْ كَتَبْتُ قَاعِدَةً وَاحِدَةً، لَكَانَتْ: "قَبْلَ أَنْ تَقُولَ: غَرِيبٌ، اسْأَلْ: لِمَاذَا؟"</a:t>
@@ -15045,6 +15171,7 @@
                   <a:srgbClr val="1B3B6F"/>
                 </a:solidFill>
                 <a:latin typeface="Amiri" pitchFamily="2" charset="-78"/>
+                <a:ea typeface="Amiri" pitchFamily="2" charset="-78"/>
                 <a:cs typeface="Amiri" pitchFamily="2" charset="-78"/>
               </a:rPr>
               <a:t>لَوْ كَتَبْتَ قَاعِدَةً وَاحِدَةً لِلْمُقَارَنَةِ بَيْنَ الثَّقَافَاتِ، فَمَا هِيَ؟</a:t>
@@ -15254,6 +15381,7 @@
                   <a:srgbClr val="D4AF37"/>
                 </a:solidFill>
                 <a:latin typeface="Amiri" pitchFamily="2" charset="-78"/>
+                <a:ea typeface="Amiri" pitchFamily="2" charset="-78"/>
                 <a:cs typeface="Amiri" pitchFamily="2" charset="-78"/>
               </a:rPr>
               <a:t>م</a:t>
@@ -15574,6 +15702,7 @@
                   <a:srgbClr val="8A6D1E"/>
                 </a:solidFill>
                 <a:latin typeface="Amiri" pitchFamily="2" charset="-78"/>
+                <a:ea typeface="Amiri" pitchFamily="2" charset="-78"/>
                 <a:cs typeface="Amiri" pitchFamily="2" charset="-78"/>
               </a:rPr>
               <a:t>هُنَا وَهُنَاكَ</a:t>
@@ -15854,6 +15983,7 @@
                   <a:srgbClr val="1B3B6F"/>
                 </a:solidFill>
                 <a:latin typeface="Amiri" pitchFamily="2" charset="-78"/>
+                <a:ea typeface="Amiri" pitchFamily="2" charset="-78"/>
                 <a:cs typeface="Amiri" pitchFamily="2" charset="-78"/>
               </a:rPr>
               <a:t>… أَكْبَرُ مِنْ …</a:t>
@@ -15930,6 +16060,7 @@
                   <a:srgbClr val="1B3B6F"/>
                 </a:solidFill>
                 <a:latin typeface="Amiri" pitchFamily="2" charset="-78"/>
+                <a:ea typeface="Amiri" pitchFamily="2" charset="-78"/>
                 <a:cs typeface="Amiri" pitchFamily="2" charset="-78"/>
               </a:rPr>
               <a:t>أَيُّهُمَا أَكْبَرُ: مَدِينَتُكَ أَمْ مَدِينَةُ أَجْدَادِكَ؟</a:t>
@@ -16098,6 +16229,7 @@
                   <a:srgbClr val="1B3B6F"/>
                 </a:solidFill>
                 <a:latin typeface="Amiri" pitchFamily="2" charset="-78"/>
+                <a:ea typeface="Amiri" pitchFamily="2" charset="-78"/>
                 <a:cs typeface="Amiri" pitchFamily="2" charset="-78"/>
               </a:rPr>
               <a:t>الطَّقْسُ فِي … أَحَرُّ مِنْ …</a:t>
@@ -16174,6 +16306,7 @@
                   <a:srgbClr val="1B3B6F"/>
                 </a:solidFill>
                 <a:latin typeface="Amiri" pitchFamily="2" charset="-78"/>
+                <a:ea typeface="Amiri" pitchFamily="2" charset="-78"/>
                 <a:cs typeface="Amiri" pitchFamily="2" charset="-78"/>
               </a:rPr>
               <a:t>أَيْنَ الطَّقْسُ أَحَرُّ؟</a:t>
@@ -16342,6 +16475,7 @@
                   <a:srgbClr val="1B3B6F"/>
                 </a:solidFill>
                 <a:latin typeface="Amiri" pitchFamily="2" charset="-78"/>
+                <a:ea typeface="Amiri" pitchFamily="2" charset="-78"/>
                 <a:cs typeface="Amiri" pitchFamily="2" charset="-78"/>
               </a:rPr>
               <a:t>نَعَمْ / غَالِبًا …</a:t>
@@ -16418,6 +16552,7 @@
                   <a:srgbClr val="1B3B6F"/>
                 </a:solidFill>
                 <a:latin typeface="Amiri" pitchFamily="2" charset="-78"/>
+                <a:ea typeface="Amiri" pitchFamily="2" charset="-78"/>
                 <a:cs typeface="Amiri" pitchFamily="2" charset="-78"/>
               </a:rPr>
               <a:t>هَلْ تَأْكُلُونَ مَعًا فِي البَيْتِ؟</a:t>
@@ -16586,6 +16721,7 @@
                   <a:srgbClr val="1B3B6F"/>
                 </a:solidFill>
                 <a:latin typeface="Amiri" pitchFamily="2" charset="-78"/>
+                <a:ea typeface="Amiri" pitchFamily="2" charset="-78"/>
                 <a:cs typeface="Amiri" pitchFamily="2" charset="-78"/>
               </a:rPr>
               <a:t>العُطْلَةُ …</a:t>
@@ -16662,6 +16798,7 @@
                   <a:srgbClr val="1B3B6F"/>
                 </a:solidFill>
                 <a:latin typeface="Amiri" pitchFamily="2" charset="-78"/>
+                <a:ea typeface="Amiri" pitchFamily="2" charset="-78"/>
                 <a:cs typeface="Amiri" pitchFamily="2" charset="-78"/>
               </a:rPr>
               <a:t>مَا أَيَّامُ العُطْلَةِ فِي بَلَدِ أَجْدَادِكَ؟</a:t>
@@ -16830,6 +16967,7 @@
                   <a:srgbClr val="1B3B6F"/>
                 </a:solidFill>
                 <a:latin typeface="Amiri" pitchFamily="2" charset="-78"/>
+                <a:ea typeface="Amiri" pitchFamily="2" charset="-78"/>
                 <a:cs typeface="Amiri" pitchFamily="2" charset="-78"/>
               </a:rPr>
               <a:t>فِيهِمَا … وَ…</a:t>
@@ -16906,6 +17044,7 @@
                   <a:srgbClr val="1B3B6F"/>
                 </a:solidFill>
                 <a:latin typeface="Amiri" pitchFamily="2" charset="-78"/>
+                <a:ea typeface="Amiri" pitchFamily="2" charset="-78"/>
                 <a:cs typeface="Amiri" pitchFamily="2" charset="-78"/>
               </a:rPr>
               <a:t>هَلِ الثَّقَافَتَانِ مُخْتَلِفَتَانِ جِدًّا؟</a:t>
@@ -17060,6 +17199,7 @@
                   <a:srgbClr val="1B3B6F"/>
                 </a:solidFill>
                 <a:latin typeface="Amiri" pitchFamily="2" charset="-78"/>
+                <a:ea typeface="Amiri" pitchFamily="2" charset="-78"/>
                 <a:cs typeface="Amiri" pitchFamily="2" charset="-78"/>
               </a:rPr>
               <a:t>أَكْبَرُ مِنْ</a:t>
@@ -17086,6 +17226,7 @@
                   <a:srgbClr val="1B3B6F"/>
                 </a:solidFill>
                 <a:latin typeface="Amiri" pitchFamily="2" charset="-78"/>
+                <a:ea typeface="Amiri" pitchFamily="2" charset="-78"/>
                 <a:cs typeface="Amiri" pitchFamily="2" charset="-78"/>
               </a:rPr>
               <a:t>أَحَرُّ مِنْ</a:t>
@@ -17112,6 +17253,7 @@
                   <a:srgbClr val="1B3B6F"/>
                 </a:solidFill>
                 <a:latin typeface="Amiri" pitchFamily="2" charset="-78"/>
+                <a:ea typeface="Amiri" pitchFamily="2" charset="-78"/>
                 <a:cs typeface="Amiri" pitchFamily="2" charset="-78"/>
               </a:rPr>
               <a:t>عَفْوًا، هَلْ يُمْكِنُ أَنْ تُعِيدَ السُّؤَالَ؟</a:t>
@@ -17245,6 +17387,7 @@
                   <a:srgbClr val="D4AF37"/>
                 </a:solidFill>
                 <a:latin typeface="Amiri" pitchFamily="2" charset="-78"/>
+                <a:ea typeface="Amiri" pitchFamily="2" charset="-78"/>
                 <a:cs typeface="Amiri" pitchFamily="2" charset="-78"/>
               </a:rPr>
               <a:t>م</a:t>
@@ -17565,6 +17708,7 @@
                   <a:srgbClr val="8A6D1E"/>
                 </a:solidFill>
                 <a:latin typeface="Amiri" pitchFamily="2" charset="-78"/>
+                <a:ea typeface="Amiri" pitchFamily="2" charset="-78"/>
                 <a:cs typeface="Amiri" pitchFamily="2" charset="-78"/>
               </a:rPr>
               <a:t>مُقَارَنَاتٌ مِنْ حَيَاتِي</a:t>
@@ -17845,6 +17989,7 @@
                   <a:srgbClr val="1B3B6F"/>
                 </a:solidFill>
                 <a:latin typeface="Amiri" pitchFamily="2" charset="-78"/>
+                <a:ea typeface="Amiri" pitchFamily="2" charset="-78"/>
                 <a:cs typeface="Amiri" pitchFamily="2" charset="-78"/>
               </a:rPr>
               <a:t>هُنَا … بَيْنَمَا هُنَاكَ …</a:t>
@@ -17921,6 +18066,7 @@
                   <a:srgbClr val="1B3B6F"/>
                 </a:solidFill>
                 <a:latin typeface="Amiri" pitchFamily="2" charset="-78"/>
+                <a:ea typeface="Amiri" pitchFamily="2" charset="-78"/>
                 <a:cs typeface="Amiri" pitchFamily="2" charset="-78"/>
               </a:rPr>
               <a:t>قَارِنْ بَيْنَ المَدْرَسَةِ هُنَا وَفِي بَلَدٍ عَرَبِيٍّ.</a:t>
@@ -18024,6 +18170,7 @@
                   <a:srgbClr val="1B3B6F"/>
                 </a:solidFill>
                 <a:latin typeface="Amiri" pitchFamily="2" charset="-78"/>
+                <a:ea typeface="Amiri" pitchFamily="2" charset="-78"/>
                 <a:cs typeface="Amiri" pitchFamily="2" charset="-78"/>
               </a:rPr>
               <a:t>أَمَّا الطَّعَامُ فَهُوَ … ؛ مَثَلًا …</a:t>
@@ -18100,6 +18247,7 @@
                   <a:srgbClr val="1B3B6F"/>
                 </a:solidFill>
                 <a:latin typeface="Amiri" pitchFamily="2" charset="-78"/>
+                <a:ea typeface="Amiri" pitchFamily="2" charset="-78"/>
                 <a:cs typeface="Amiri" pitchFamily="2" charset="-78"/>
               </a:rPr>
               <a:t>كَيْفَ يَخْتَلِفُ الطَّعَامُ؟</a:t>
@@ -18203,6 +18351,7 @@
                   <a:srgbClr val="1B3B6F"/>
                 </a:solidFill>
                 <a:latin typeface="Amiri" pitchFamily="2" charset="-78"/>
+                <a:ea typeface="Amiri" pitchFamily="2" charset="-78"/>
                 <a:cs typeface="Amiri" pitchFamily="2" charset="-78"/>
               </a:rPr>
               <a:t>نَعَمْ، فِي كِلْتَا الثَّقَافَتَيْنِ …</a:t>
@@ -18279,6 +18428,7 @@
                   <a:srgbClr val="1B3B6F"/>
                 </a:solidFill>
                 <a:latin typeface="Amiri" pitchFamily="2" charset="-78"/>
+                <a:ea typeface="Amiri" pitchFamily="2" charset="-78"/>
                 <a:cs typeface="Amiri" pitchFamily="2" charset="-78"/>
               </a:rPr>
               <a:t>هَلْ هُنَاكَ أَشْيَاءُ مُتَشَابِهَةٌ؟</a:t>
@@ -18382,6 +18532,7 @@
                   <a:srgbClr val="1B3B6F"/>
                 </a:solidFill>
                 <a:latin typeface="Amiri" pitchFamily="2" charset="-78"/>
+                <a:ea typeface="Amiri" pitchFamily="2" charset="-78"/>
                 <a:cs typeface="Amiri" pitchFamily="2" charset="-78"/>
               </a:rPr>
               <a:t>كُنْتُ أَظُنُّ أَنَّ … أَمَّا الآنَ فَأَعْرِفُ …</a:t>
@@ -18458,6 +18609,7 @@
                   <a:srgbClr val="1B3B6F"/>
                 </a:solidFill>
                 <a:latin typeface="Amiri" pitchFamily="2" charset="-78"/>
+                <a:ea typeface="Amiri" pitchFamily="2" charset="-78"/>
                 <a:cs typeface="Amiri" pitchFamily="2" charset="-78"/>
               </a:rPr>
               <a:t>هَلْ غَيَّرْتَ رَأْيَكَ فِي ثَقَافَةٍ مَا؟</a:t>
@@ -18561,6 +18713,7 @@
                   <a:srgbClr val="1B3B6F"/>
                 </a:solidFill>
                 <a:latin typeface="Amiri" pitchFamily="2" charset="-78"/>
+                <a:ea typeface="Amiri" pitchFamily="2" charset="-78"/>
                 <a:cs typeface="Amiri" pitchFamily="2" charset="-78"/>
               </a:rPr>
               <a:t>أُفَضِّلُ … لِأَنَّ … مَعَ أَنَّ …</a:t>
@@ -18637,6 +18790,7 @@
                   <a:srgbClr val="1B3B6F"/>
                 </a:solidFill>
                 <a:latin typeface="Amiri" pitchFamily="2" charset="-78"/>
+                <a:ea typeface="Amiri" pitchFamily="2" charset="-78"/>
                 <a:cs typeface="Amiri" pitchFamily="2" charset="-78"/>
               </a:rPr>
               <a:t>أَيْنَ تُفَضِّلُ أَنْ تَعِيشَ فِي المُسْتَقْبَلِ؟</a:t>
@@ -18846,6 +19000,7 @@
                   <a:srgbClr val="D4AF37"/>
                 </a:solidFill>
                 <a:latin typeface="Amiri" pitchFamily="2" charset="-78"/>
+                <a:ea typeface="Amiri" pitchFamily="2" charset="-78"/>
                 <a:cs typeface="Amiri" pitchFamily="2" charset="-78"/>
               </a:rPr>
               <a:t>م</a:t>
@@ -19166,6 +19321,7 @@
                   <a:srgbClr val="8A6D1E"/>
                 </a:solidFill>
                 <a:latin typeface="Amiri" pitchFamily="2" charset="-78"/>
+                <a:ea typeface="Amiri" pitchFamily="2" charset="-78"/>
                 <a:cs typeface="Amiri" pitchFamily="2" charset="-78"/>
               </a:rPr>
               <a:t>المُقَارَنَةُ وَالاحْتِرَامُ</a:t>
@@ -19446,6 +19602,7 @@
                   <a:srgbClr val="1B3B6F"/>
                 </a:solidFill>
                 <a:latin typeface="Amiri" pitchFamily="2" charset="-78"/>
+                <a:ea typeface="Amiri" pitchFamily="2" charset="-78"/>
                 <a:cs typeface="Amiri" pitchFamily="2" charset="-78"/>
               </a:rPr>
               <a:t>لِأَنَّنَا … ؛ فَمَثَلًا …</a:t>
@@ -19522,6 +19679,7 @@
                   <a:srgbClr val="1B3B6F"/>
                 </a:solidFill>
                 <a:latin typeface="Amiri" pitchFamily="2" charset="-78"/>
+                <a:ea typeface="Amiri" pitchFamily="2" charset="-78"/>
                 <a:cs typeface="Amiri" pitchFamily="2" charset="-78"/>
               </a:rPr>
               <a:t>لِمَاذَا تَقُودُ بَعْضُ المُقَارَنَاتِ إِلَى سُوءِ الفَهْمِ؟</a:t>
@@ -19625,6 +19783,7 @@
                   <a:srgbClr val="1B3B6F"/>
                 </a:solidFill>
                 <a:latin typeface="Amiri" pitchFamily="2" charset="-78"/>
+                <a:ea typeface="Amiri" pitchFamily="2" charset="-78"/>
                 <a:cs typeface="Amiri" pitchFamily="2" charset="-78"/>
               </a:rPr>
               <a:t>صَحِيحٌ أَنَّ … غَيْرَ أَنَّ …</a:t>
@@ -19701,6 +19860,7 @@
                   <a:srgbClr val="1B3B6F"/>
                 </a:solidFill>
                 <a:latin typeface="Amiri" pitchFamily="2" charset="-78"/>
+                <a:ea typeface="Amiri" pitchFamily="2" charset="-78"/>
                 <a:cs typeface="Amiri" pitchFamily="2" charset="-78"/>
               </a:rPr>
               <a:t>هَلْ يَجِبُ أَنْ يَتَكَيَّفَ المُهَاجِرُ مَعَ ثَقَافَةِ البَلَدِ الجَدِيدِ؟</a:t>
@@ -19804,6 +19964,7 @@
                   <a:srgbClr val="1B3B6F"/>
                 </a:solidFill>
                 <a:latin typeface="Amiri" pitchFamily="2" charset="-78"/>
+                <a:ea typeface="Amiri" pitchFamily="2" charset="-78"/>
                 <a:cs typeface="Amiri" pitchFamily="2" charset="-78"/>
               </a:rPr>
               <a:t>مِنْ نَاحِيَةٍ … وَمِنْ نَاحِيَةٍ أُخْرَى …</a:t>
@@ -19880,6 +20041,7 @@
                   <a:srgbClr val="1B3B6F"/>
                 </a:solidFill>
                 <a:latin typeface="Amiri" pitchFamily="2" charset="-78"/>
+                <a:ea typeface="Amiri" pitchFamily="2" charset="-78"/>
                 <a:cs typeface="Amiri" pitchFamily="2" charset="-78"/>
               </a:rPr>
               <a:t>هَلِ العَالَمُ اليَوْمَ أَكْثَرُ تَسَامُحًا مِمَّا كَانَ؟</a:t>
@@ -19983,6 +20145,7 @@
                   <a:srgbClr val="1B3B6F"/>
                 </a:solidFill>
                 <a:latin typeface="Amiri" pitchFamily="2" charset="-78"/>
+                <a:ea typeface="Amiri" pitchFamily="2" charset="-78"/>
                 <a:cs typeface="Amiri" pitchFamily="2" charset="-78"/>
               </a:rPr>
               <a:t>رَغْمَ … فَإِنَّ …</a:t>
@@ -20059,6 +20222,7 @@
                   <a:srgbClr val="1B3B6F"/>
                 </a:solidFill>
                 <a:latin typeface="Amiri" pitchFamily="2" charset="-78"/>
+                <a:ea typeface="Amiri" pitchFamily="2" charset="-78"/>
                 <a:cs typeface="Amiri" pitchFamily="2" charset="-78"/>
               </a:rPr>
               <a:t>مَا الَّذِي يَجْمَعُ الثَّقَافَاتِ كُلَّهَا؟</a:t>
@@ -20162,6 +20326,7 @@
                   <a:srgbClr val="1B3B6F"/>
                 </a:solidFill>
                 <a:latin typeface="Amiri" pitchFamily="2" charset="-78"/>
+                <a:ea typeface="Amiri" pitchFamily="2" charset="-78"/>
                 <a:cs typeface="Amiri" pitchFamily="2" charset="-78"/>
               </a:rPr>
               <a:t>لَوْ عِشْتُ …، لَتَعَلَّمْتُ …</a:t>
@@ -20238,6 +20403,7 @@
                   <a:srgbClr val="1B3B6F"/>
                 </a:solidFill>
                 <a:latin typeface="Amiri" pitchFamily="2" charset="-78"/>
+                <a:ea typeface="Amiri" pitchFamily="2" charset="-78"/>
                 <a:cs typeface="Amiri" pitchFamily="2" charset="-78"/>
               </a:rPr>
               <a:t>لَوْ عِشْتَ يَوْمًا فِي ثَقَافَةٍ مُخْتَلِفَةٍ تَمَامًا، مَاذَا تَتَعَلَّمُ؟</a:t>
@@ -20447,6 +20613,7 @@
                   <a:srgbClr val="D4AF37"/>
                 </a:solidFill>
                 <a:latin typeface="Amiri" pitchFamily="2" charset="-78"/>
+                <a:ea typeface="Amiri" pitchFamily="2" charset="-78"/>
                 <a:cs typeface="Amiri" pitchFamily="2" charset="-78"/>
               </a:rPr>
               <a:t>م</a:t>
@@ -20767,6 +20934,7 @@
                   <a:srgbClr val="8A6D1E"/>
                 </a:solidFill>
                 <a:latin typeface="Amiri" pitchFamily="2" charset="-78"/>
+                <a:ea typeface="Amiri" pitchFamily="2" charset="-78"/>
                 <a:cs typeface="Amiri" pitchFamily="2" charset="-78"/>
               </a:rPr>
               <a:t>آدَابُ الصَّفِّ</a:t>
@@ -22298,6 +22466,7 @@
                   <a:srgbClr val="D4AF37"/>
                 </a:solidFill>
                 <a:latin typeface="Amiri" pitchFamily="2" charset="-78"/>
+                <a:ea typeface="Amiri" pitchFamily="2" charset="-78"/>
                 <a:cs typeface="Amiri" pitchFamily="2" charset="-78"/>
               </a:rPr>
               <a:t>م</a:t>
@@ -22618,6 +22787,7 @@
                   <a:srgbClr val="8A6D1E"/>
                 </a:solidFill>
                 <a:latin typeface="Amiri" pitchFamily="2" charset="-78"/>
+                <a:ea typeface="Amiri" pitchFamily="2" charset="-78"/>
                 <a:cs typeface="Amiri" pitchFamily="2" charset="-78"/>
               </a:rPr>
               <a:t>نَمُوذَجُ الإِجَابَةِ</a:t>
@@ -22860,6 +23030,7 @@
                   <a:srgbClr val="1B3B6F"/>
                 </a:solidFill>
                 <a:latin typeface="Amiri" pitchFamily="2" charset="-78"/>
+                <a:ea typeface="Amiri" pitchFamily="2" charset="-78"/>
                 <a:cs typeface="Amiri" pitchFamily="2" charset="-78"/>
               </a:rPr>
               <a:t>مَدِينَتِي أَكْبَرُ مِنْ مَدِينَةِ أَجْدَادِي.</a:t>
@@ -22936,6 +23107,7 @@
                   <a:srgbClr val="1B3B6F"/>
                 </a:solidFill>
                 <a:latin typeface="Amiri" pitchFamily="2" charset="-78"/>
+                <a:ea typeface="Amiri" pitchFamily="2" charset="-78"/>
                 <a:cs typeface="Amiri" pitchFamily="2" charset="-78"/>
               </a:rPr>
               <a:t>أَيُّهُمَا أَكْبَرُ: مَدِينَتُكَ أَمْ مَدِينَةُ أَجْدَادِكَ؟</a:t>
@@ -23039,6 +23211,7 @@
                   <a:srgbClr val="1B3B6F"/>
                 </a:solidFill>
                 <a:latin typeface="Amiri" pitchFamily="2" charset="-78"/>
+                <a:ea typeface="Amiri" pitchFamily="2" charset="-78"/>
                 <a:cs typeface="Amiri" pitchFamily="2" charset="-78"/>
               </a:rPr>
               <a:t>الطَّقْسُ فِي مِصْرَ أَحَرُّ مِنْ بَرِيطَانْيَا.</a:t>
@@ -23115,6 +23288,7 @@
                   <a:srgbClr val="1B3B6F"/>
                 </a:solidFill>
                 <a:latin typeface="Amiri" pitchFamily="2" charset="-78"/>
+                <a:ea typeface="Amiri" pitchFamily="2" charset="-78"/>
                 <a:cs typeface="Amiri" pitchFamily="2" charset="-78"/>
               </a:rPr>
               <a:t>أَيْنَ الطَّقْسُ أَحَرُّ؟</a:t>
@@ -23218,6 +23392,7 @@
                   <a:srgbClr val="1B3B6F"/>
                 </a:solidFill>
                 <a:latin typeface="Amiri" pitchFamily="2" charset="-78"/>
+                <a:ea typeface="Amiri" pitchFamily="2" charset="-78"/>
                 <a:cs typeface="Amiri" pitchFamily="2" charset="-78"/>
               </a:rPr>
               <a:t>نَعَمْ، غَالِبًا نَأْكُلُ العَشَاءَ مَعًا.</a:t>
@@ -23294,6 +23469,7 @@
                   <a:srgbClr val="1B3B6F"/>
                 </a:solidFill>
                 <a:latin typeface="Amiri" pitchFamily="2" charset="-78"/>
+                <a:ea typeface="Amiri" pitchFamily="2" charset="-78"/>
                 <a:cs typeface="Amiri" pitchFamily="2" charset="-78"/>
               </a:rPr>
               <a:t>هَلْ تَأْكُلُونَ مَعًا فِي البَيْتِ؟</a:t>
@@ -23397,6 +23573,7 @@
                   <a:srgbClr val="1B3B6F"/>
                 </a:solidFill>
                 <a:latin typeface="Amiri" pitchFamily="2" charset="-78"/>
+                <a:ea typeface="Amiri" pitchFamily="2" charset="-78"/>
                 <a:cs typeface="Amiri" pitchFamily="2" charset="-78"/>
               </a:rPr>
               <a:t>العُطْلَةُ هُنَاكَ الجُمُعَةُ وَالسَّبْتُ.</a:t>
@@ -23473,6 +23650,7 @@
                   <a:srgbClr val="1B3B6F"/>
                 </a:solidFill>
                 <a:latin typeface="Amiri" pitchFamily="2" charset="-78"/>
+                <a:ea typeface="Amiri" pitchFamily="2" charset="-78"/>
                 <a:cs typeface="Amiri" pitchFamily="2" charset="-78"/>
               </a:rPr>
               <a:t>مَا أَيَّامُ العُطْلَةِ فِي بَلَدِ أَجْدَادِكَ؟</a:t>
@@ -23576,6 +23754,7 @@
                   <a:srgbClr val="1B3B6F"/>
                 </a:solidFill>
                 <a:latin typeface="Amiri" pitchFamily="2" charset="-78"/>
+                <a:ea typeface="Amiri" pitchFamily="2" charset="-78"/>
                 <a:cs typeface="Amiri" pitchFamily="2" charset="-78"/>
               </a:rPr>
               <a:t>فِيهِمَا اخْتِلَافَاتٌ، لٰكِنْ فِيهِمَا تَشَابُهٌ أَيْضًا.</a:t>
@@ -23652,6 +23831,7 @@
                   <a:srgbClr val="1B3B6F"/>
                 </a:solidFill>
                 <a:latin typeface="Amiri" pitchFamily="2" charset="-78"/>
+                <a:ea typeface="Amiri" pitchFamily="2" charset="-78"/>
                 <a:cs typeface="Amiri" pitchFamily="2" charset="-78"/>
               </a:rPr>
               <a:t>هَلِ الثَّقَافَتَانِ مُخْتَلِفَتَانِ جِدًّا؟</a:t>
@@ -23861,6 +24041,7 @@
                   <a:srgbClr val="D4AF37"/>
                 </a:solidFill>
                 <a:latin typeface="Amiri" pitchFamily="2" charset="-78"/>
+                <a:ea typeface="Amiri" pitchFamily="2" charset="-78"/>
                 <a:cs typeface="Amiri" pitchFamily="2" charset="-78"/>
               </a:rPr>
               <a:t>م</a:t>
@@ -24181,6 +24362,7 @@
                   <a:srgbClr val="8A6D1E"/>
                 </a:solidFill>
                 <a:latin typeface="Amiri" pitchFamily="2" charset="-78"/>
+                <a:ea typeface="Amiri" pitchFamily="2" charset="-78"/>
                 <a:cs typeface="Amiri" pitchFamily="2" charset="-78"/>
               </a:rPr>
               <a:t>نَمُوذَجُ الإِجَابَةِ</a:t>
@@ -24423,6 +24605,7 @@
                   <a:srgbClr val="1B3B6F"/>
                 </a:solidFill>
                 <a:latin typeface="Amiri" pitchFamily="2" charset="-78"/>
+                <a:ea typeface="Amiri" pitchFamily="2" charset="-78"/>
                 <a:cs typeface="Amiri" pitchFamily="2" charset="-78"/>
               </a:rPr>
               <a:t>هُنَا نَدْرُسُ فِي مَجْمُوعَاتٍ صَغِيرَةٍ، بَيْنَمَا الصُّفُوفُ هُنَاكَ غَالِبًا أَكْبَرُ، وَالطُّلَّابُ يَقِفُونَ عِنْدَمَا يَدْخُلُ المُعَلِّمُ.</a:t>
@@ -24499,6 +24682,7 @@
                   <a:srgbClr val="1B3B6F"/>
                 </a:solidFill>
                 <a:latin typeface="Amiri" pitchFamily="2" charset="-78"/>
+                <a:ea typeface="Amiri" pitchFamily="2" charset="-78"/>
                 <a:cs typeface="Amiri" pitchFamily="2" charset="-78"/>
               </a:rPr>
               <a:t>قَارِنْ بَيْنَ المَدْرَسَةِ هُنَا وَفِي بَلَدٍ عَرَبِيٍّ.</a:t>
@@ -24602,6 +24786,7 @@
                   <a:srgbClr val="1B3B6F"/>
                 </a:solidFill>
                 <a:latin typeface="Amiri" pitchFamily="2" charset="-78"/>
+                <a:ea typeface="Amiri" pitchFamily="2" charset="-78"/>
                 <a:cs typeface="Amiri" pitchFamily="2" charset="-78"/>
               </a:rPr>
               <a:t>أَمَّا الطَّعَامُ فَهُوَ أَكْثَرُ تَوَابِلَ عِنْدَنَا؛ مَثَلًا، نَضَعُ الكَمُّونَ فِي كُلِّ شَيْءٍ تَقْرِيبًا!</a:t>
@@ -24678,6 +24863,7 @@
                   <a:srgbClr val="1B3B6F"/>
                 </a:solidFill>
                 <a:latin typeface="Amiri" pitchFamily="2" charset="-78"/>
+                <a:ea typeface="Amiri" pitchFamily="2" charset="-78"/>
                 <a:cs typeface="Amiri" pitchFamily="2" charset="-78"/>
               </a:rPr>
               <a:t>كَيْفَ يَخْتَلِفُ الطَّعَامُ؟</a:t>
@@ -24781,6 +24967,7 @@
                   <a:srgbClr val="1B3B6F"/>
                 </a:solidFill>
                 <a:latin typeface="Amiri" pitchFamily="2" charset="-78"/>
+                <a:ea typeface="Amiri" pitchFamily="2" charset="-78"/>
                 <a:cs typeface="Amiri" pitchFamily="2" charset="-78"/>
               </a:rPr>
               <a:t>نَعَمْ، فِي كِلْتَا الثَّقَافَتَيْنِ يُحِبُّ النَّاسُ كُرَةَ القَدَمِ، وَيَحْتَرِمُونَ كِبَارَ السِّنِّ.</a:t>
@@ -24857,6 +25044,7 @@
                   <a:srgbClr val="1B3B6F"/>
                 </a:solidFill>
                 <a:latin typeface="Amiri" pitchFamily="2" charset="-78"/>
+                <a:ea typeface="Amiri" pitchFamily="2" charset="-78"/>
                 <a:cs typeface="Amiri" pitchFamily="2" charset="-78"/>
               </a:rPr>
               <a:t>هَلْ هُنَاكَ أَشْيَاءُ مُتَشَابِهَةٌ؟</a:t>
@@ -24960,6 +25148,7 @@
                   <a:srgbClr val="1B3B6F"/>
                 </a:solidFill>
                 <a:latin typeface="Amiri" pitchFamily="2" charset="-78"/>
+                <a:ea typeface="Amiri" pitchFamily="2" charset="-78"/>
                 <a:cs typeface="Amiri" pitchFamily="2" charset="-78"/>
               </a:rPr>
               <a:t>كُنْتُ أَظُنُّ أَنَّ الإِنْجْلِيزَ لَا يُحِبُّونَ الضُّيُوفَ، أَمَّا الآنَ فَأَعْرِفُ أَنَّهُمْ يُحِبُّونَ الدَّعَوَاتِ المُخَطَّطَ لَهَا مُسْبَقًا.</a:t>
@@ -25036,6 +25225,7 @@
                   <a:srgbClr val="1B3B6F"/>
                 </a:solidFill>
                 <a:latin typeface="Amiri" pitchFamily="2" charset="-78"/>
+                <a:ea typeface="Amiri" pitchFamily="2" charset="-78"/>
                 <a:cs typeface="Amiri" pitchFamily="2" charset="-78"/>
               </a:rPr>
               <a:t>هَلْ غَيَّرْتَ رَأْيَكَ فِي ثَقَافَةٍ مَا؟</a:t>
@@ -25139,6 +25329,7 @@
                   <a:srgbClr val="1B3B6F"/>
                 </a:solidFill>
                 <a:latin typeface="Amiri" pitchFamily="2" charset="-78"/>
+                <a:ea typeface="Amiri" pitchFamily="2" charset="-78"/>
                 <a:cs typeface="Amiri" pitchFamily="2" charset="-78"/>
               </a:rPr>
               <a:t>أُفَضِّلُ بَرِيطَانْيَا لِلدِّرَاسَةِ، مَعَ أَنَّ الطَّقْسَ أَبْرَدُ، لٰكِنَّنِي سَأَقْضِي الصَّيْفَ دَائِمًا مَعَ أَقَارِبِي فِي السُّودَانِ.</a:t>
@@ -25215,6 +25406,7 @@
                   <a:srgbClr val="1B3B6F"/>
                 </a:solidFill>
                 <a:latin typeface="Amiri" pitchFamily="2" charset="-78"/>
+                <a:ea typeface="Amiri" pitchFamily="2" charset="-78"/>
                 <a:cs typeface="Amiri" pitchFamily="2" charset="-78"/>
               </a:rPr>
               <a:t>أَيْنَ تُفَضِّلُ أَنْ تَعِيشَ فِي المُسْتَقْبَلِ؟</a:t>
@@ -25424,6 +25616,7 @@
                   <a:srgbClr val="D4AF37"/>
                 </a:solidFill>
                 <a:latin typeface="Amiri" pitchFamily="2" charset="-78"/>
+                <a:ea typeface="Amiri" pitchFamily="2" charset="-78"/>
                 <a:cs typeface="Amiri" pitchFamily="2" charset="-78"/>
               </a:rPr>
               <a:t>م</a:t>
@@ -25744,6 +25937,7 @@
                   <a:srgbClr val="8A6D1E"/>
                 </a:solidFill>
                 <a:latin typeface="Amiri" pitchFamily="2" charset="-78"/>
+                <a:ea typeface="Amiri" pitchFamily="2" charset="-78"/>
                 <a:cs typeface="Amiri" pitchFamily="2" charset="-78"/>
               </a:rPr>
               <a:t>نَمُوذَجُ الإِجَابَةِ</a:t>
@@ -25986,6 +26180,7 @@
                   <a:srgbClr val="1B3B6F"/>
                 </a:solidFill>
                 <a:latin typeface="Amiri" pitchFamily="2" charset="-78"/>
+                <a:ea typeface="Amiri" pitchFamily="2" charset="-78"/>
                 <a:cs typeface="Amiri" pitchFamily="2" charset="-78"/>
               </a:rPr>
               <a:t>لِأَنَّنَا نَحْكُمُ عَلَى الآخَرِينَ بِمَقَايِيسِنَا نَحْنُ؛ فَمَثَلًا، مَا نَرَاهُ "صَوْتًا عَالِيًا" قَدْ يَكُونُ عِنْدَهُمْ تَعْبِيرًا عَنِ الحَمَاسِ لَا الغَضَبِ.</a:t>
@@ -26062,6 +26257,7 @@
                   <a:srgbClr val="1B3B6F"/>
                 </a:solidFill>
                 <a:latin typeface="Amiri" pitchFamily="2" charset="-78"/>
+                <a:ea typeface="Amiri" pitchFamily="2" charset="-78"/>
                 <a:cs typeface="Amiri" pitchFamily="2" charset="-78"/>
               </a:rPr>
               <a:t>لِمَاذَا تَقُودُ بَعْضُ المُقَارَنَاتِ إِلَى سُوءِ الفَهْمِ؟</a:t>
@@ -26165,6 +26361,7 @@
                   <a:srgbClr val="1B3B6F"/>
                 </a:solidFill>
                 <a:latin typeface="Amiri" pitchFamily="2" charset="-78"/>
+                <a:ea typeface="Amiri" pitchFamily="2" charset="-78"/>
                 <a:cs typeface="Amiri" pitchFamily="2" charset="-78"/>
               </a:rPr>
               <a:t>صَحِيحٌ أَنَّ عَلَيْهِ أَنْ يَحْتَرِمَ القَوَانِينَ وَالعَادَاتِ العَامَّةَ، غَيْرَ أَنَّ التَّكَيُّفَ لَا يَعْنِي أَنْ يَنْسَى ثَقَافَتَهُ، بَلْ أَنْ يَبْنِيَ جِسْرًا بَيْنَهُمَا.</a:t>
@@ -26244,6 +26441,7 @@
                   <a:srgbClr val="1B3B6F"/>
                 </a:solidFill>
                 <a:latin typeface="Amiri" pitchFamily="2" charset="-78"/>
+                <a:ea typeface="Amiri" pitchFamily="2" charset="-78"/>
                 <a:cs typeface="Amiri" pitchFamily="2" charset="-78"/>
               </a:rPr>
               <a:t>هَلْ يَجِبُ أَنْ يَتَكَيَّفَ المُهَاجِرُ مَعَ ثَقَافَةِ البَلَدِ الجَدِيدِ؟</a:t>
@@ -26347,6 +26545,7 @@
                   <a:srgbClr val="1B3B6F"/>
                 </a:solidFill>
                 <a:latin typeface="Amiri" pitchFamily="2" charset="-78"/>
+                <a:ea typeface="Amiri" pitchFamily="2" charset="-78"/>
                 <a:cs typeface="Amiri" pitchFamily="2" charset="-78"/>
               </a:rPr>
               <a:t>مِنْ نَاحِيَةٍ، نَعْرِفُ عَنْ بَعْضِنَا أَكْثَرَ بِفَضْلِ الإِنْتَرْنِتِ، وَمِنْ نَاحِيَةٍ أُخْرَى، تَنْتَشِرُ الصُّوَرُ النَّمَطِيَّةُ أَسْرَعَ مِنْ أَيِّ وَقْتٍ مَضَى.</a:t>
@@ -26423,6 +26622,7 @@
                   <a:srgbClr val="1B3B6F"/>
                 </a:solidFill>
                 <a:latin typeface="Amiri" pitchFamily="2" charset="-78"/>
+                <a:ea typeface="Amiri" pitchFamily="2" charset="-78"/>
                 <a:cs typeface="Amiri" pitchFamily="2" charset="-78"/>
               </a:rPr>
               <a:t>هَلِ العَالَمُ اليَوْمَ أَكْثَرُ تَسَامُحًا مِمَّا كَانَ؟</a:t>
@@ -26632,6 +26832,7 @@
                   <a:srgbClr val="D4AF37"/>
                 </a:solidFill>
                 <a:latin typeface="Amiri" pitchFamily="2" charset="-78"/>
+                <a:ea typeface="Amiri" pitchFamily="2" charset="-78"/>
                 <a:cs typeface="Amiri" pitchFamily="2" charset="-78"/>
               </a:rPr>
               <a:t>م</a:t>
@@ -26952,6 +27153,7 @@
                   <a:srgbClr val="8A6D1E"/>
                 </a:solidFill>
                 <a:latin typeface="Amiri" pitchFamily="2" charset="-78"/>
+                <a:ea typeface="Amiri" pitchFamily="2" charset="-78"/>
                 <a:cs typeface="Amiri" pitchFamily="2" charset="-78"/>
               </a:rPr>
               <a:t>نَمُوذَجُ الإِجَابَةِ</a:t>
@@ -27194,6 +27396,7 @@
                   <a:srgbClr val="1B3B6F"/>
                 </a:solidFill>
                 <a:latin typeface="Amiri" pitchFamily="2" charset="-78"/>
+                <a:ea typeface="Amiri" pitchFamily="2" charset="-78"/>
                 <a:cs typeface="Amiri" pitchFamily="2" charset="-78"/>
               </a:rPr>
               <a:t>رَغْمَ اخْتِلَافِ اللُّغَاتِ وَالأَطْعِمَةِ، فَإِنَّ كُلَّ الثَّقَافَاتِ تُحِبُّ الأَطْفَالَ، وَتُكْرِمُ الضَّيْفَ، وَتَحْزَنُ عَلَى الفَقْدِ.</a:t>
@@ -27270,6 +27473,7 @@
                   <a:srgbClr val="1B3B6F"/>
                 </a:solidFill>
                 <a:latin typeface="Amiri" pitchFamily="2" charset="-78"/>
+                <a:ea typeface="Amiri" pitchFamily="2" charset="-78"/>
                 <a:cs typeface="Amiri" pitchFamily="2" charset="-78"/>
               </a:rPr>
               <a:t>مَا الَّذِي يَجْمَعُ الثَّقَافَاتِ كُلَّهَا؟</a:t>
@@ -27373,6 +27577,7 @@
                   <a:srgbClr val="1B3B6F"/>
                 </a:solidFill>
                 <a:latin typeface="Amiri" pitchFamily="2" charset="-78"/>
+                <a:ea typeface="Amiri" pitchFamily="2" charset="-78"/>
                 <a:cs typeface="Amiri" pitchFamily="2" charset="-78"/>
               </a:rPr>
               <a:t>لَوْ عِشْتُ يَوْمًا مَعَ عَائِلَةٍ فِي قَرْيَةٍ يَابَانِيَّةٍ، لَتَعَلَّمْتُ الصَّمْتَ وَالدِّقَّةَ، وَلَأَدْرَكْتُ أَنَّ عَادَاتِي لَيْسَتِ الطَّرِيقَةَ الوَحِيدَةَ لِلْحَيَاةِ.</a:t>
@@ -27452,6 +27657,7 @@
                   <a:srgbClr val="1B3B6F"/>
                 </a:solidFill>
                 <a:latin typeface="Amiri" pitchFamily="2" charset="-78"/>
+                <a:ea typeface="Amiri" pitchFamily="2" charset="-78"/>
                 <a:cs typeface="Amiri" pitchFamily="2" charset="-78"/>
               </a:rPr>
               <a:t>لَوْ عِشْتَ يَوْمًا فِي ثَقَافَةٍ مُخْتَلِفَةٍ تَمَامًا، مَاذَا تَتَعَلَّمُ؟</a:t>
@@ -27661,6 +27867,7 @@
                   <a:srgbClr val="D4AF37"/>
                 </a:solidFill>
                 <a:latin typeface="Amiri" pitchFamily="2" charset="-78"/>
+                <a:ea typeface="Amiri" pitchFamily="2" charset="-78"/>
                 <a:cs typeface="Amiri" pitchFamily="2" charset="-78"/>
               </a:rPr>
               <a:t>م</a:t>
@@ -27981,6 +28188,7 @@
                   <a:srgbClr val="8A6D1E"/>
                 </a:solidFill>
                 <a:latin typeface="Amiri" pitchFamily="2" charset="-78"/>
+                <a:ea typeface="Amiri" pitchFamily="2" charset="-78"/>
                 <a:cs typeface="Amiri" pitchFamily="2" charset="-78"/>
               </a:rPr>
               <a:t>قَيِّمْ عَمَلَكَ</a:t>
@@ -29225,6 +29433,7 @@
                   <a:srgbClr val="FFFFFF"/>
                 </a:solidFill>
                 <a:latin typeface="Amiri" pitchFamily="2" charset="-78"/>
+                <a:ea typeface="Amiri" pitchFamily="2" charset="-78"/>
                 <a:cs typeface="Amiri" pitchFamily="2" charset="-78"/>
               </a:rPr>
               <a:t>أَحْسَنْتُمْ! إِلَى اللِّقَاءِ</a:t>
@@ -29377,6 +29586,7 @@
                   <a:srgbClr val="D4AF37"/>
                 </a:solidFill>
                 <a:latin typeface="Amiri" pitchFamily="2" charset="-78"/>
+                <a:ea typeface="Amiri" pitchFamily="2" charset="-78"/>
                 <a:cs typeface="Amiri" pitchFamily="2" charset="-78"/>
               </a:rPr>
               <a:t>وَرْشَةُ الكِتَابَةِ</a:t>
@@ -29510,6 +29720,7 @@
                   <a:srgbClr val="D4AF37"/>
                 </a:solidFill>
                 <a:latin typeface="Amiri" pitchFamily="2" charset="-78"/>
+                <a:ea typeface="Amiri" pitchFamily="2" charset="-78"/>
                 <a:cs typeface="Amiri" pitchFamily="2" charset="-78"/>
               </a:rPr>
               <a:t>م</a:t>
@@ -29830,6 +30041,7 @@
                   <a:srgbClr val="8A6D1E"/>
                 </a:solidFill>
                 <a:latin typeface="Amiri" pitchFamily="2" charset="-78"/>
+                <a:ea typeface="Amiri" pitchFamily="2" charset="-78"/>
                 <a:cs typeface="Amiri" pitchFamily="2" charset="-78"/>
               </a:rPr>
               <a:t>خَرِيطَةُ الوَرْشَةِ</a:t>
@@ -30144,6 +30356,7 @@
                   <a:srgbClr val="1B3B6F"/>
                 </a:solidFill>
                 <a:latin typeface="Amiri" pitchFamily="2" charset="-78"/>
+                <a:ea typeface="Amiri" pitchFamily="2" charset="-78"/>
                 <a:cs typeface="Amiri" pitchFamily="2" charset="-78"/>
               </a:rPr>
               <a:t>كَيْفَ</a:t>
@@ -30420,6 +30633,7 @@
                   <a:srgbClr val="1E6B52"/>
                 </a:solidFill>
                 <a:latin typeface="Amiri" pitchFamily="2" charset="-78"/>
+                <a:ea typeface="Amiri" pitchFamily="2" charset="-78"/>
                 <a:cs typeface="Amiri" pitchFamily="2" charset="-78"/>
               </a:rPr>
               <a:t>تَمْثِيلُ الدَّوْرِ</a:t>
@@ -30696,6 +30910,7 @@
                   <a:srgbClr val="8A6D1E"/>
                 </a:solidFill>
                 <a:latin typeface="Amiri" pitchFamily="2" charset="-78"/>
+                <a:ea typeface="Amiri" pitchFamily="2" charset="-78"/>
                 <a:cs typeface="Amiri" pitchFamily="2" charset="-78"/>
               </a:rPr>
               <a:t>النَّمُوذَجُ</a:t>
@@ -30972,6 +31187,7 @@
                   <a:srgbClr val="1E6B52"/>
                 </a:solidFill>
                 <a:latin typeface="Amiri" pitchFamily="2" charset="-78"/>
+                <a:ea typeface="Amiri" pitchFamily="2" charset="-78"/>
                 <a:cs typeface="Amiri" pitchFamily="2" charset="-78"/>
               </a:rPr>
               <a:t>المُحَادَثَةُ</a:t>
@@ -31248,6 +31464,7 @@
                   <a:srgbClr val="8A6D1E"/>
                 </a:solidFill>
                 <a:latin typeface="Amiri" pitchFamily="2" charset="-78"/>
+                <a:ea typeface="Amiri" pitchFamily="2" charset="-78"/>
                 <a:cs typeface="Amiri" pitchFamily="2" charset="-78"/>
               </a:rPr>
               <a:t>قَيِّمْ</a:t>
@@ -31491,6 +31708,7 @@
                   <a:srgbClr val="D4AF37"/>
                 </a:solidFill>
                 <a:latin typeface="Amiri" pitchFamily="2" charset="-78"/>
+                <a:ea typeface="Amiri" pitchFamily="2" charset="-78"/>
                 <a:cs typeface="Amiri" pitchFamily="2" charset="-78"/>
               </a:rPr>
               <a:t>م</a:t>
@@ -31811,6 +32029,7 @@
                   <a:srgbClr val="8A6D1E"/>
                 </a:solidFill>
                 <a:latin typeface="Amiri" pitchFamily="2" charset="-78"/>
+                <a:ea typeface="Amiri" pitchFamily="2" charset="-78"/>
                 <a:cs typeface="Amiri" pitchFamily="2" charset="-78"/>
               </a:rPr>
               <a:t>امْتِحَانُ التَّحَدُّثِ</a:t>
@@ -32435,6 +32654,7 @@
                   <a:srgbClr val="1B3B6F"/>
                 </a:solidFill>
                 <a:latin typeface="Amiri" pitchFamily="2" charset="-78"/>
+                <a:ea typeface="Amiri" pitchFamily="2" charset="-78"/>
                 <a:cs typeface="Amiri" pitchFamily="2" charset="-78"/>
               </a:rPr>
               <a:t>عَفْوًا، هَلْ يُمْكِنُ أَنْ تُعِيدَ السُّؤَالَ؟</a:t>
@@ -32534,6 +32754,7 @@
                   <a:srgbClr val="1B3B6F"/>
                 </a:solidFill>
                 <a:latin typeface="Amiri" pitchFamily="2" charset="-78"/>
+                <a:ea typeface="Amiri" pitchFamily="2" charset="-78"/>
                 <a:cs typeface="Amiri" pitchFamily="2" charset="-78"/>
               </a:rPr>
               <a:t>لَحْظَةً، دَعْنِي أُفَكِّرُ …</a:t>
@@ -32633,6 +32854,7 @@
                   <a:srgbClr val="1B3B6F"/>
                 </a:solidFill>
                 <a:latin typeface="Amiri" pitchFamily="2" charset="-78"/>
+                <a:ea typeface="Amiri" pitchFamily="2" charset="-78"/>
                 <a:cs typeface="Amiri" pitchFamily="2" charset="-78"/>
               </a:rPr>
               <a:t>أَقْصِدُ …</a:t>
@@ -32804,6 +33026,7 @@
                   <a:srgbClr val="D4AF37"/>
                 </a:solidFill>
                 <a:latin typeface="Amiri" pitchFamily="2" charset="-78"/>
+                <a:ea typeface="Amiri" pitchFamily="2" charset="-78"/>
                 <a:cs typeface="Amiri" pitchFamily="2" charset="-78"/>
               </a:rPr>
               <a:t>م</a:t>
@@ -33124,6 +33347,7 @@
                   <a:srgbClr val="8A6D1E"/>
                 </a:solidFill>
                 <a:latin typeface="Amiri" pitchFamily="2" charset="-78"/>
+                <a:ea typeface="Amiri" pitchFamily="2" charset="-78"/>
                 <a:cs typeface="Amiri" pitchFamily="2" charset="-78"/>
               </a:rPr>
               <a:t>أَدَوَاتُ المُقَارَنَةِ</a:t>
@@ -33427,6 +33651,7 @@
                   <a:srgbClr val="1B3B6F"/>
                 </a:solidFill>
                 <a:latin typeface="Amiri" pitchFamily="2" charset="-78"/>
+                <a:ea typeface="Amiri" pitchFamily="2" charset="-78"/>
                 <a:cs typeface="Amiri" pitchFamily="2" charset="-78"/>
               </a:rPr>
               <a:t>أَطْوَلُ مِنْ</a:t>
@@ -33584,6 +33809,7 @@
                   <a:srgbClr val="1B3B6F"/>
                 </a:solidFill>
                 <a:latin typeface="Amiri" pitchFamily="2" charset="-78"/>
+                <a:ea typeface="Amiri" pitchFamily="2" charset="-78"/>
                 <a:cs typeface="Amiri" pitchFamily="2" charset="-78"/>
               </a:rPr>
               <a:t>أَبْكَرُ مِنْ</a:t>
@@ -33687,6 +33913,7 @@
                   <a:srgbClr val="1B3B6F"/>
                 </a:solidFill>
                 <a:latin typeface="Amiri" pitchFamily="2" charset="-78"/>
+                <a:ea typeface="Amiri" pitchFamily="2" charset="-78"/>
                 <a:cs typeface="Amiri" pitchFamily="2" charset="-78"/>
               </a:rPr>
               <a:t>أَقْصَرُ مِنْ</a:t>
@@ -33952,6 +34179,7 @@
                   <a:srgbClr val="1B3B6F"/>
                 </a:solidFill>
                 <a:latin typeface="Amiri" pitchFamily="2" charset="-78"/>
+                <a:ea typeface="Amiri" pitchFamily="2" charset="-78"/>
                 <a:cs typeface="Amiri" pitchFamily="2" charset="-78"/>
               </a:rPr>
               <a:t>أَكْثَرُ … مِنْ</a:t>
@@ -34109,6 +34337,7 @@
                   <a:srgbClr val="1B3B6F"/>
                 </a:solidFill>
                 <a:latin typeface="Amiri" pitchFamily="2" charset="-78"/>
+                <a:ea typeface="Amiri" pitchFamily="2" charset="-78"/>
                 <a:cs typeface="Amiri" pitchFamily="2" charset="-78"/>
               </a:rPr>
               <a:t>أَكْثَرُ رَسْمِيَّةً</a:t>
@@ -34212,6 +34441,7 @@
                   <a:srgbClr val="1B3B6F"/>
                 </a:solidFill>
                 <a:latin typeface="Amiri" pitchFamily="2" charset="-78"/>
+                <a:ea typeface="Amiri" pitchFamily="2" charset="-78"/>
                 <a:cs typeface="Amiri" pitchFamily="2" charset="-78"/>
               </a:rPr>
               <a:t>أَقَلُّ … مِنْ</a:t>
@@ -34477,6 +34707,7 @@
                   <a:srgbClr val="1B3B6F"/>
                 </a:solidFill>
                 <a:latin typeface="Amiri" pitchFamily="2" charset="-78"/>
+                <a:ea typeface="Amiri" pitchFamily="2" charset="-78"/>
                 <a:cs typeface="Amiri" pitchFamily="2" charset="-78"/>
               </a:rPr>
               <a:t>بَيْنَمَا</a:t>
@@ -34634,6 +34865,7 @@
                   <a:srgbClr val="1B3B6F"/>
                 </a:solidFill>
                 <a:latin typeface="Amiri" pitchFamily="2" charset="-78"/>
+                <a:ea typeface="Amiri" pitchFamily="2" charset="-78"/>
                 <a:cs typeface="Amiri" pitchFamily="2" charset="-78"/>
               </a:rPr>
               <a:t>بِعَكْسِ</a:t>
@@ -34737,6 +34969,7 @@
                   <a:srgbClr val="1B3B6F"/>
                 </a:solidFill>
                 <a:latin typeface="Amiri" pitchFamily="2" charset="-78"/>
+                <a:ea typeface="Amiri" pitchFamily="2" charset="-78"/>
                 <a:cs typeface="Amiri" pitchFamily="2" charset="-78"/>
               </a:rPr>
               <a:t>فِي المُقَابِلِ</a:t>
@@ -35002,6 +35235,7 @@
                   <a:srgbClr val="1B3B6F"/>
                 </a:solidFill>
                 <a:latin typeface="Amiri" pitchFamily="2" charset="-78"/>
+                <a:ea typeface="Amiri" pitchFamily="2" charset="-78"/>
                 <a:cs typeface="Amiri" pitchFamily="2" charset="-78"/>
               </a:rPr>
               <a:t>أَمَّا … فَإِنَّ …</a:t>
@@ -35159,6 +35393,7 @@
                   <a:srgbClr val="1B3B6F"/>
                 </a:solidFill>
                 <a:latin typeface="Amiri" pitchFamily="2" charset="-78"/>
+                <a:ea typeface="Amiri" pitchFamily="2" charset="-78"/>
                 <a:cs typeface="Amiri" pitchFamily="2" charset="-78"/>
               </a:rPr>
               <a:t>أَمَّا المَدْرَسَةُ فَهِيَ …</a:t>
@@ -35262,6 +35497,7 @@
                   <a:srgbClr val="1B3B6F"/>
                 </a:solidFill>
                 <a:latin typeface="Amiri" pitchFamily="2" charset="-78"/>
+                <a:ea typeface="Amiri" pitchFamily="2" charset="-78"/>
                 <a:cs typeface="Amiri" pitchFamily="2" charset="-78"/>
               </a:rPr>
               <a:t>أَمَّا نَحْنُ فَنَأْكُلُ</a:t>
@@ -35527,6 +35763,7 @@
                   <a:srgbClr val="1B3B6F"/>
                 </a:solidFill>
                 <a:latin typeface="Amiri" pitchFamily="2" charset="-78"/>
+                <a:ea typeface="Amiri" pitchFamily="2" charset="-78"/>
                 <a:cs typeface="Amiri" pitchFamily="2" charset="-78"/>
               </a:rPr>
               <a:t>يَتَشَابَهُ</a:t>
@@ -35684,6 +35921,7 @@
                   <a:srgbClr val="1B3B6F"/>
                 </a:solidFill>
                 <a:latin typeface="Amiri" pitchFamily="2" charset="-78"/>
+                <a:ea typeface="Amiri" pitchFamily="2" charset="-78"/>
                 <a:cs typeface="Amiri" pitchFamily="2" charset="-78"/>
               </a:rPr>
               <a:t>كِلَاهُمَا</a:t>
@@ -35787,6 +36025,7 @@
                   <a:srgbClr val="1B3B6F"/>
                 </a:solidFill>
                 <a:latin typeface="Amiri" pitchFamily="2" charset="-78"/>
+                <a:ea typeface="Amiri" pitchFamily="2" charset="-78"/>
                 <a:cs typeface="Amiri" pitchFamily="2" charset="-78"/>
               </a:rPr>
               <a:t>تَشَابُهٌ</a:t>
@@ -36052,6 +36291,7 @@
                   <a:srgbClr val="1B3B6F"/>
                 </a:solidFill>
                 <a:latin typeface="Amiri" pitchFamily="2" charset="-78"/>
+                <a:ea typeface="Amiri" pitchFamily="2" charset="-78"/>
                 <a:cs typeface="Amiri" pitchFamily="2" charset="-78"/>
               </a:rPr>
               <a:t>مُخْتَلِفٌ لَا أَفْضَلُ</a:t>
@@ -36209,6 +36449,7 @@
                   <a:srgbClr val="1B3B6F"/>
                 </a:solidFill>
                 <a:latin typeface="Amiri" pitchFamily="2" charset="-78"/>
+                <a:ea typeface="Amiri" pitchFamily="2" charset="-78"/>
                 <a:cs typeface="Amiri" pitchFamily="2" charset="-78"/>
               </a:rPr>
               <a:t>مَزَايَاهُ</a:t>
@@ -36312,6 +36553,7 @@
                   <a:srgbClr val="1B3B6F"/>
                 </a:solidFill>
                 <a:latin typeface="Amiri" pitchFamily="2" charset="-78"/>
+                <a:ea typeface="Amiri" pitchFamily="2" charset="-78"/>
                 <a:cs typeface="Amiri" pitchFamily="2" charset="-78"/>
               </a:rPr>
               <a:t>لِكُلٍّ مِنْهُمَا</a:t>
@@ -36445,6 +36687,7 @@
                   <a:srgbClr val="D4AF37"/>
                 </a:solidFill>
                 <a:latin typeface="Amiri" pitchFamily="2" charset="-78"/>
+                <a:ea typeface="Amiri" pitchFamily="2" charset="-78"/>
                 <a:cs typeface="Amiri" pitchFamily="2" charset="-78"/>
               </a:rPr>
               <a:t>م</a:t>
@@ -36765,6 +37008,7 @@
                   <a:srgbClr val="8A6D1E"/>
                 </a:solidFill>
                 <a:latin typeface="Amiri" pitchFamily="2" charset="-78"/>
+                <a:ea typeface="Amiri" pitchFamily="2" charset="-78"/>
                 <a:cs typeface="Amiri" pitchFamily="2" charset="-78"/>
               </a:rPr>
               <a:t>المُقَارَنَةُ بِاحْتِرَامٍ</a:t>
@@ -37068,6 +37312,7 @@
                   <a:srgbClr val="1B3B6F"/>
                 </a:solidFill>
                 <a:latin typeface="Amiri" pitchFamily="2" charset="-78"/>
+                <a:ea typeface="Amiri" pitchFamily="2" charset="-78"/>
                 <a:cs typeface="Amiri" pitchFamily="2" charset="-78"/>
               </a:rPr>
               <a:t>غَالِبًا</a:t>
@@ -37225,6 +37470,7 @@
                   <a:srgbClr val="1B3B6F"/>
                 </a:solidFill>
                 <a:latin typeface="Amiri" pitchFamily="2" charset="-78"/>
+                <a:ea typeface="Amiri" pitchFamily="2" charset="-78"/>
                 <a:cs typeface="Amiri" pitchFamily="2" charset="-78"/>
               </a:rPr>
               <a:t>لَيْسَ الجَمِيعُ</a:t>
@@ -37328,6 +37574,7 @@
                   <a:srgbClr val="1B3B6F"/>
                 </a:solidFill>
                 <a:latin typeface="Amiri" pitchFamily="2" charset="-78"/>
+                <a:ea typeface="Amiri" pitchFamily="2" charset="-78"/>
                 <a:cs typeface="Amiri" pitchFamily="2" charset="-78"/>
               </a:rPr>
               <a:t>بَعْضُ النَّاسِ</a:t>
@@ -37593,6 +37840,7 @@
                   <a:srgbClr val="1B3B6F"/>
                 </a:solidFill>
                 <a:latin typeface="Amiri" pitchFamily="2" charset="-78"/>
+                <a:ea typeface="Amiri" pitchFamily="2" charset="-78"/>
                 <a:cs typeface="Amiri" pitchFamily="2" charset="-78"/>
               </a:rPr>
               <a:t>تَعْمِيمٌ</a:t>
@@ -37750,6 +37998,7 @@
                   <a:srgbClr val="1B3B6F"/>
                 </a:solidFill>
                 <a:latin typeface="Amiri" pitchFamily="2" charset="-78"/>
+                <a:ea typeface="Amiri" pitchFamily="2" charset="-78"/>
                 <a:cs typeface="Amiri" pitchFamily="2" charset="-78"/>
               </a:rPr>
               <a:t>يَحْكُمُ عَلَى</a:t>
@@ -37853,6 +38102,7 @@
                   <a:srgbClr val="1B3B6F"/>
                 </a:solidFill>
                 <a:latin typeface="Amiri" pitchFamily="2" charset="-78"/>
+                <a:ea typeface="Amiri" pitchFamily="2" charset="-78"/>
                 <a:cs typeface="Amiri" pitchFamily="2" charset="-78"/>
               </a:rPr>
               <a:t>صُورَةٌ نَمَطِيَّةٌ</a:t>
@@ -38118,6 +38368,7 @@
                   <a:srgbClr val="1B3B6F"/>
                 </a:solidFill>
                 <a:latin typeface="Amiri" pitchFamily="2" charset="-78"/>
+                <a:ea typeface="Amiri" pitchFamily="2" charset="-78"/>
                 <a:cs typeface="Amiri" pitchFamily="2" charset="-78"/>
               </a:rPr>
               <a:t>عُطْلَةُ نِهَايَةِ الأُسْبُوعِ</a:t>
@@ -38275,6 +38526,7 @@
                   <a:srgbClr val="1B3B6F"/>
                 </a:solidFill>
                 <a:latin typeface="Amiri" pitchFamily="2" charset="-78"/>
+                <a:ea typeface="Amiri" pitchFamily="2" charset="-78"/>
                 <a:cs typeface="Amiri" pitchFamily="2" charset="-78"/>
               </a:rPr>
               <a:t>السَّبْتُ وَالأَحَدُ</a:t>
@@ -38378,6 +38630,7 @@
                   <a:srgbClr val="1B3B6F"/>
                 </a:solidFill>
                 <a:latin typeface="Amiri" pitchFamily="2" charset="-78"/>
+                <a:ea typeface="Amiri" pitchFamily="2" charset="-78"/>
                 <a:cs typeface="Amiri" pitchFamily="2" charset="-78"/>
               </a:rPr>
               <a:t>الجُمُعَةُ وَالسَّبْتُ</a:t>
@@ -38643,6 +38896,7 @@
                   <a:srgbClr val="1B3B6F"/>
                 </a:solidFill>
                 <a:latin typeface="Amiri" pitchFamily="2" charset="-78"/>
+                <a:ea typeface="Amiri" pitchFamily="2" charset="-78"/>
                 <a:cs typeface="Amiri" pitchFamily="2" charset="-78"/>
               </a:rPr>
               <a:t>زِيٌّ مَدْرَسِيٌّ</a:t>
@@ -38800,6 +39054,7 @@
                   <a:srgbClr val="1B3B6F"/>
                 </a:solidFill>
                 <a:latin typeface="Amiri" pitchFamily="2" charset="-78"/>
+                <a:ea typeface="Amiri" pitchFamily="2" charset="-78"/>
                 <a:cs typeface="Amiri" pitchFamily="2" charset="-78"/>
               </a:rPr>
               <a:t>اخْتِيَارِيٌّ</a:t>
@@ -38903,6 +39158,7 @@
                   <a:srgbClr val="1B3B6F"/>
                 </a:solidFill>
                 <a:latin typeface="Amiri" pitchFamily="2" charset="-78"/>
+                <a:ea typeface="Amiri" pitchFamily="2" charset="-78"/>
                 <a:cs typeface="Amiri" pitchFamily="2" charset="-78"/>
               </a:rPr>
               <a:t>إِلْزَامِيٌّ</a:t>
@@ -39168,6 +39424,7 @@
                   <a:srgbClr val="1B3B6F"/>
                 </a:solidFill>
                 <a:latin typeface="Amiri" pitchFamily="2" charset="-78"/>
+                <a:ea typeface="Amiri" pitchFamily="2" charset="-78"/>
                 <a:cs typeface="Amiri" pitchFamily="2" charset="-78"/>
               </a:rPr>
               <a:t>العَائِلَةُ المُمْتَدَّةُ</a:t>
@@ -39325,6 +39582,7 @@
                   <a:srgbClr val="1B3B6F"/>
                 </a:solidFill>
                 <a:latin typeface="Amiri" pitchFamily="2" charset="-78"/>
+                <a:ea typeface="Amiri" pitchFamily="2" charset="-78"/>
                 <a:cs typeface="Amiri" pitchFamily="2" charset="-78"/>
               </a:rPr>
               <a:t>الأَقَارِبُ</a:t>
@@ -39428,6 +39686,7 @@
                   <a:srgbClr val="1B3B6F"/>
                 </a:solidFill>
                 <a:latin typeface="Amiri" pitchFamily="2" charset="-78"/>
+                <a:ea typeface="Amiri" pitchFamily="2" charset="-78"/>
                 <a:cs typeface="Amiri" pitchFamily="2" charset="-78"/>
               </a:rPr>
               <a:t>الأُسْرَةُ الصَّغِيرَةُ</a:t>
@@ -39693,6 +39952,7 @@
                   <a:srgbClr val="1B3B6F"/>
                 </a:solidFill>
                 <a:latin typeface="Amiri" pitchFamily="2" charset="-78"/>
+                <a:ea typeface="Amiri" pitchFamily="2" charset="-78"/>
                 <a:cs typeface="Amiri" pitchFamily="2" charset="-78"/>
               </a:rPr>
               <a:t>أَحْتَرِمُ</a:t>
@@ -39850,6 +40110,7 @@
                   <a:srgbClr val="1B3B6F"/>
                 </a:solidFill>
                 <a:latin typeface="Amiri" pitchFamily="2" charset="-78"/>
+                <a:ea typeface="Amiri" pitchFamily="2" charset="-78"/>
                 <a:cs typeface="Amiri" pitchFamily="2" charset="-78"/>
               </a:rPr>
               <a:t>أُقَدِّرُ</a:t>
@@ -39953,6 +40214,7 @@
                   <a:srgbClr val="1B3B6F"/>
                 </a:solidFill>
                 <a:latin typeface="Amiri" pitchFamily="2" charset="-78"/>
+                <a:ea typeface="Amiri" pitchFamily="2" charset="-78"/>
                 <a:cs typeface="Amiri" pitchFamily="2" charset="-78"/>
               </a:rPr>
               <a:t>الاحْتِرَامُ</a:t>
@@ -40086,6 +40348,7 @@
                   <a:srgbClr val="D4AF37"/>
                 </a:solidFill>
                 <a:latin typeface="Amiri" pitchFamily="2" charset="-78"/>
+                <a:ea typeface="Amiri" pitchFamily="2" charset="-78"/>
                 <a:cs typeface="Amiri" pitchFamily="2" charset="-78"/>
               </a:rPr>
               <a:t>م</a:t>
@@ -40406,6 +40669,7 @@
                   <a:srgbClr val="8A6D1E"/>
                 </a:solidFill>
                 <a:latin typeface="Amiri" pitchFamily="2" charset="-78"/>
+                <a:ea typeface="Amiri" pitchFamily="2" charset="-78"/>
                 <a:cs typeface="Amiri" pitchFamily="2" charset="-78"/>
               </a:rPr>
               <a:t>فِي الغُرَفِ</a:t>
@@ -41582,6 +41846,7 @@
                   <a:srgbClr val="1B3B6F"/>
                 </a:solidFill>
                 <a:latin typeface="Amiri" pitchFamily="2" charset="-78"/>
+                <a:ea typeface="Amiri" pitchFamily="2" charset="-78"/>
                 <a:cs typeface="Amiri" pitchFamily="2" charset="-78"/>
               </a:rPr>
               <a:t>دَوْرُكَ!</a:t>
@@ -41658,6 +41923,7 @@
                   <a:srgbClr val="1B3B6F"/>
                 </a:solidFill>
                 <a:latin typeface="Amiri" pitchFamily="2" charset="-78"/>
+                <a:ea typeface="Amiri" pitchFamily="2" charset="-78"/>
                 <a:cs typeface="Amiri" pitchFamily="2" charset="-78"/>
               </a:rPr>
               <a:t>أَحْسَنْتَ! / أَحْسَنْتِ!</a:t>
@@ -41734,6 +42000,7 @@
                   <a:srgbClr val="1B3B6F"/>
                 </a:solidFill>
                 <a:latin typeface="Amiri" pitchFamily="2" charset="-78"/>
+                <a:ea typeface="Amiri" pitchFamily="2" charset="-78"/>
                 <a:cs typeface="Amiri" pitchFamily="2" charset="-78"/>
               </a:rPr>
               <a:t>تَكَلَّمْ أَكْثَرَ، مِنْ فَضْلِكَ</a:t>
@@ -41810,6 +42077,7 @@
                   <a:srgbClr val="1B3B6F"/>
                 </a:solidFill>
                 <a:latin typeface="Amiri" pitchFamily="2" charset="-78"/>
+                <a:ea typeface="Amiri" pitchFamily="2" charset="-78"/>
                 <a:cs typeface="Amiri" pitchFamily="2" charset="-78"/>
               </a:rPr>
               <a:t>لِمَاذَا؟</a:t>
@@ -41981,6 +42249,7 @@
                   <a:srgbClr val="D4AF37"/>
                 </a:solidFill>
                 <a:latin typeface="Amiri" pitchFamily="2" charset="-78"/>
+                <a:ea typeface="Amiri" pitchFamily="2" charset="-78"/>
                 <a:cs typeface="Amiri" pitchFamily="2" charset="-78"/>
               </a:rPr>
               <a:t>م</a:t>
@@ -42301,6 +42570,7 @@
                   <a:srgbClr val="8A6D1E"/>
                 </a:solidFill>
                 <a:latin typeface="Amiri" pitchFamily="2" charset="-78"/>
+                <a:ea typeface="Amiri" pitchFamily="2" charset="-78"/>
                 <a:cs typeface="Amiri" pitchFamily="2" charset="-78"/>
               </a:rPr>
               <a:t>مُقَارَنَةُ اليَوْمِ الدِّرَاسِيِّ</a:t>
@@ -42581,6 +42851,7 @@
                   <a:srgbClr val="1B3B6F"/>
                 </a:solidFill>
                 <a:latin typeface="Amiri" pitchFamily="2" charset="-78"/>
+                <a:ea typeface="Amiri" pitchFamily="2" charset="-78"/>
                 <a:cs typeface="Amiri" pitchFamily="2" charset="-78"/>
               </a:rPr>
               <a:t>يَبْدَأُ فِي …</a:t>
@@ -42657,6 +42928,7 @@
                   <a:srgbClr val="1B3B6F"/>
                 </a:solidFill>
                 <a:latin typeface="Amiri" pitchFamily="2" charset="-78"/>
+                <a:ea typeface="Amiri" pitchFamily="2" charset="-78"/>
                 <a:cs typeface="Amiri" pitchFamily="2" charset="-78"/>
               </a:rPr>
               <a:t>مَتَى يَبْدَأُ يَوْمُكَ الدِّرَاسِيُّ؟</a:t>
@@ -42825,6 +43097,7 @@
                   <a:srgbClr val="1B3B6F"/>
                 </a:solidFill>
                 <a:latin typeface="Amiri" pitchFamily="2" charset="-78"/>
+                <a:ea typeface="Amiri" pitchFamily="2" charset="-78"/>
                 <a:cs typeface="Amiri" pitchFamily="2" charset="-78"/>
               </a:rPr>
               <a:t>يَوْمُكُمْ أَبْكَرُ مِنْ …</a:t>
@@ -42901,6 +43174,7 @@
                   <a:srgbClr val="1B3B6F"/>
                 </a:solidFill>
                 <a:latin typeface="Amiri" pitchFamily="2" charset="-78"/>
+                <a:ea typeface="Amiri" pitchFamily="2" charset="-78"/>
                 <a:cs typeface="Amiri" pitchFamily="2" charset="-78"/>
               </a:rPr>
               <a:t>نَحْنُ نَبْدَأُ فِي السَّابِعَةِ!</a:t>
@@ -43069,6 +43343,7 @@
                   <a:srgbClr val="1B3B6F"/>
                 </a:solidFill>
                 <a:latin typeface="Amiri" pitchFamily="2" charset="-78"/>
+                <a:ea typeface="Amiri" pitchFamily="2" charset="-78"/>
                 <a:cs typeface="Amiri" pitchFamily="2" charset="-78"/>
               </a:rPr>
               <a:t>السَّبْتُ وَ…</a:t>
@@ -43145,6 +43420,7 @@
                   <a:srgbClr val="1B3B6F"/>
                 </a:solidFill>
                 <a:latin typeface="Amiri" pitchFamily="2" charset="-78"/>
+                <a:ea typeface="Amiri" pitchFamily="2" charset="-78"/>
                 <a:cs typeface="Amiri" pitchFamily="2" charset="-78"/>
               </a:rPr>
               <a:t>مَا أَيَّامُ العُطْلَةِ عِنْدَكُمْ؟</a:t>
@@ -43313,6 +43589,7 @@
                   <a:srgbClr val="1B3B6F"/>
                 </a:solidFill>
                 <a:latin typeface="Amiri" pitchFamily="2" charset="-78"/>
+                <a:ea typeface="Amiri" pitchFamily="2" charset="-78"/>
                 <a:cs typeface="Amiri" pitchFamily="2" charset="-78"/>
               </a:rPr>
               <a:t>هَلْ … ؟</a:t>
@@ -43389,6 +43666,7 @@
                   <a:srgbClr val="1B3B6F"/>
                 </a:solidFill>
                 <a:latin typeface="Amiri" pitchFamily="2" charset="-78"/>
+                <a:ea typeface="Amiri" pitchFamily="2" charset="-78"/>
                 <a:cs typeface="Amiri" pitchFamily="2" charset="-78"/>
               </a:rPr>
               <a:t>عُطْلَتُنَا الجُمُعَةُ وَالسَّبْتُ.</a:t>
@@ -43557,6 +43835,7 @@
                   <a:srgbClr val="1B3B6F"/>
                 </a:solidFill>
                 <a:latin typeface="Amiri" pitchFamily="2" charset="-78"/>
+                <a:ea typeface="Amiri" pitchFamily="2" charset="-78"/>
                 <a:cs typeface="Amiri" pitchFamily="2" charset="-78"/>
               </a:rPr>
               <a:t>أُحِبُّ … لِأَنَّ …</a:t>
@@ -43633,6 +43912,7 @@
                   <a:srgbClr val="1B3B6F"/>
                 </a:solidFill>
                 <a:latin typeface="Amiri" pitchFamily="2" charset="-78"/>
+                <a:ea typeface="Amiri" pitchFamily="2" charset="-78"/>
                 <a:cs typeface="Amiri" pitchFamily="2" charset="-78"/>
               </a:rPr>
               <a:t>نَعَمْ. مَا الشَّيْءُ الَّذِي تُحِبُّهُ فِي مَدْرَسَتِكَ؟</a:t>
@@ -43907,6 +44187,7 @@
                   <a:srgbClr val="D4AF37"/>
                 </a:solidFill>
                 <a:latin typeface="Amiri" pitchFamily="2" charset="-78"/>
+                <a:ea typeface="Amiri" pitchFamily="2" charset="-78"/>
                 <a:cs typeface="Amiri" pitchFamily="2" charset="-78"/>
               </a:rPr>
               <a:t>م</a:t>
@@ -44227,6 +44508,7 @@
                   <a:srgbClr val="8A6D1E"/>
                 </a:solidFill>
                 <a:latin typeface="Amiri" pitchFamily="2" charset="-78"/>
+                <a:ea typeface="Amiri" pitchFamily="2" charset="-78"/>
                 <a:cs typeface="Amiri" pitchFamily="2" charset="-78"/>
               </a:rPr>
               <a:t>زَمِيلٌ جَدِيدٌ مِنْ سُورِيَا</a:t>
@@ -44507,6 +44789,7 @@
                   <a:srgbClr val="1B3B6F"/>
                 </a:solidFill>
                 <a:latin typeface="Amiri" pitchFamily="2" charset="-78"/>
+                <a:ea typeface="Amiri" pitchFamily="2" charset="-78"/>
                 <a:cs typeface="Amiri" pitchFamily="2" charset="-78"/>
               </a:rPr>
               <a:t>كَيْفَ …؟</a:t>
@@ -44583,6 +44866,7 @@
                   <a:srgbClr val="1B3B6F"/>
                 </a:solidFill>
                 <a:latin typeface="Amiri" pitchFamily="2" charset="-78"/>
+                <a:ea typeface="Amiri" pitchFamily="2" charset="-78"/>
                 <a:cs typeface="Amiri" pitchFamily="2" charset="-78"/>
               </a:rPr>
               <a:t>المَدْرَسَةُ هُنَا مُخْتَلِفَةٌ جِدًّا!</a:t>
@@ -44751,6 +45035,7 @@
                   <a:srgbClr val="1B3B6F"/>
                 </a:solidFill>
                 <a:latin typeface="Amiri" pitchFamily="2" charset="-78"/>
+                <a:ea typeface="Amiri" pitchFamily="2" charset="-78"/>
                 <a:cs typeface="Amiri" pitchFamily="2" charset="-78"/>
               </a:rPr>
               <a:t>صَحِيحٌ، وَ… أَكْثَرُ … مِنْ …</a:t>
@@ -44827,6 +45112,7 @@
                   <a:srgbClr val="1B3B6F"/>
                 </a:solidFill>
                 <a:latin typeface="Amiri" pitchFamily="2" charset="-78"/>
+                <a:ea typeface="Amiri" pitchFamily="2" charset="-78"/>
                 <a:cs typeface="Amiri" pitchFamily="2" charset="-78"/>
               </a:rPr>
               <a:t>الصُّفُوفُ هُنَا أَصْغَرُ، وَالمُعَلِّمُونَ يَمْشُونَ بَيْنَ الطُّلَّابِ.</a:t>
@@ -44995,6 +45281,7 @@
                   <a:srgbClr val="1B3B6F"/>
                 </a:solidFill>
                 <a:latin typeface="Amiri" pitchFamily="2" charset="-78"/>
+                <a:ea typeface="Amiri" pitchFamily="2" charset="-78"/>
                 <a:cs typeface="Amiri" pitchFamily="2" charset="-78"/>
               </a:rPr>
               <a:t>نَعَمْ، هُنَا … بَيْنَمَا عِنْدَكُمْ …</a:t>
@@ -45071,6 +45358,7 @@
                   <a:srgbClr val="1B3B6F"/>
                 </a:solidFill>
                 <a:latin typeface="Amiri" pitchFamily="2" charset="-78"/>
+                <a:ea typeface="Amiri" pitchFamily="2" charset="-78"/>
                 <a:cs typeface="Amiri" pitchFamily="2" charset="-78"/>
               </a:rPr>
               <a:t>وَالطُّلَّابُ يُنَادُونَ المُعَلِّمَ بِاسْمِهِ!</a:t>
@@ -45174,6 +45462,7 @@
                   <a:srgbClr val="1B3B6F"/>
                 </a:solidFill>
                 <a:latin typeface="Amiri" pitchFamily="2" charset="-78"/>
+                <a:ea typeface="Amiri" pitchFamily="2" charset="-78"/>
                 <a:cs typeface="Amiri" pitchFamily="2" charset="-78"/>
               </a:rPr>
               <a:t>طَبْعًا! سَأُرِيكَ … ؛ وَمَا …؟</a:t>
@@ -45250,6 +45539,7 @@
                   <a:srgbClr val="1B3B6F"/>
                 </a:solidFill>
                 <a:latin typeface="Amiri" pitchFamily="2" charset="-78"/>
+                <a:ea typeface="Amiri" pitchFamily="2" charset="-78"/>
                 <a:cs typeface="Amiri" pitchFamily="2" charset="-78"/>
               </a:rPr>
               <a:t>هَلْ يُمْكِنُكَ أَنْ تُسَاعِدَنِي؟</a:t>
@@ -45353,6 +45643,7 @@
                   <a:srgbClr val="1B3B6F"/>
                 </a:solidFill>
                 <a:latin typeface="Amiri" pitchFamily="2" charset="-78"/>
+                <a:ea typeface="Amiri" pitchFamily="2" charset="-78"/>
                 <a:cs typeface="Amiri" pitchFamily="2" charset="-78"/>
               </a:rPr>
               <a:t>لَيْسَ الجَمِيعُ … ؛ غَالِبًا …</a:t>
@@ -45429,6 +45720,7 @@
                   <a:srgbClr val="1B3B6F"/>
                 </a:solidFill>
                 <a:latin typeface="Amiri" pitchFamily="2" charset="-78"/>
+                <a:ea typeface="Amiri" pitchFamily="2" charset="-78"/>
                 <a:cs typeface="Amiri" pitchFamily="2" charset="-78"/>
               </a:rPr>
               <a:t>الرِّيَاضِيَّاتُ. هَلِ النَّاسُ هُنَا بَارِدُونَ كَمَا يُقَالُ؟</a:t>
@@ -45603,13 +45895,9 @@
     <a:fontScheme name="Office">
       <a:majorFont>
         <a:latin typeface="Calibri Light" panose="020F0302020204030204"/>
-        <a:ea typeface=""/>
-        <a:cs typeface=""/>
-        <a:font script="Jpan" typeface="游ゴシック Light"/>
-        <a:font script="Hang" typeface="맑은 고딕"/>
-        <a:font script="Hans" typeface="等线 Light"/>
-        <a:font script="Hant" typeface="新細明體"/>
-        <a:font script="Arab" typeface="Times New Roman"/>
+        <a:ea typeface="Amiri" pitchFamily="2" charset="-78"/>
+        <a:cs typeface="Amiri" pitchFamily="2" charset="-78"/>
+        <a:font script="Arab" typeface="Amiri"/>
         <a:font script="Hebr" typeface="Times New Roman"/>
         <a:font script="Thai" typeface="Angsana New"/>
         <a:font script="Ethi" typeface="Nyala"/>
@@ -45655,13 +45943,9 @@
       </a:majorFont>
       <a:minorFont>
         <a:latin typeface="Calibri" panose="020F0502020204030204"/>
-        <a:ea typeface=""/>
-        <a:cs typeface=""/>
-        <a:font script="Jpan" typeface="游ゴシック"/>
-        <a:font script="Hang" typeface="맑은 고딕"/>
-        <a:font script="Hans" typeface="等线"/>
-        <a:font script="Hant" typeface="新細明體"/>
-        <a:font script="Arab" typeface="Arial"/>
+        <a:ea typeface="Amiri" pitchFamily="2" charset="-78"/>
+        <a:cs typeface="Amiri" pitchFamily="2" charset="-78"/>
+        <a:font script="Arab" typeface="Amiri"/>
         <a:font script="Hebr" typeface="Arial"/>
         <a:font script="Thai" typeface="Cordia New"/>
         <a:font script="Ethi" typeface="Nyala"/>
